--- a/docs/realdreamteam-overview.pptx
+++ b/docs/realdreamteam-overview.pptx
@@ -8,8 +8,11 @@
     <p:sldId id="256" r:id="rId7"/>
     <p:sldId id="257" r:id="rId8"/>
     <p:sldId id="258" r:id="rId9"/>
+    <p:sldId id="259" r:id="rId10"/>
+    <p:sldId id="260" r:id="rId11"/>
+    <p:sldId id="261" r:id="rId12"/>
   </p:sldIdLst>
-  <p:sldSz cx="12191695" cy="6858000" type="screen4x3"/>
+  <p:sldSz cx="9144000" cy="5143500" type="screen4x3"/>
   <p:notesSz cx="6858000" cy="9144000"/>
   <p:defaultTextStyle>
     <a:defPPr>
@@ -3092,39 +3095,122 @@
       <p:grpSpPr/>
       <p:sp>
         <p:nvSpPr>
-          <p:cNvPr id="2" name="Rectangle 1"/>
-          <p:cNvSpPr/>
-          <p:nvPr/>
-        </p:nvSpPr>
-        <p:spPr>
-          <a:xfrm>
-            <a:off x="0" y="0"/>
-            <a:ext cx="12191695" cy="1051560"/>
+          <p:cNvPr id="2" name="TextBox 1"/>
+          <p:cNvSpPr txBox="1"/>
+          <p:nvPr/>
+        </p:nvSpPr>
+        <p:spPr>
+          <a:xfrm>
+            <a:off x="457200" y="1234440"/>
+            <a:ext cx="8229600" cy="822960"/>
           </a:xfrm>
           <a:prstGeom prst="rect">
             <a:avLst/>
           </a:prstGeom>
+          <a:noFill/>
+        </p:spPr>
+        <p:txBody>
+          <a:bodyPr wrap="square" anchor="t" lIns="0" rIns="0" tIns="0" bIns="0">
+            <a:spAutoFit/>
+          </a:bodyPr>
+          <a:lstStyle/>
+          <a:p>
+            <a:pPr algn="ctr">
+              <a:spcAft>
+                <a:spcPts val="400"/>
+              </a:spcAft>
+            </a:pPr>
+            <a:r>
+              <a:rPr sz="4400" b="1" i="0">
+                <a:solidFill>
+                  <a:srgbClr val="111827"/>
+                </a:solidFill>
+                <a:latin typeface="Arial"/>
+              </a:rPr>
+              <a:t>Real Dream Team</a:t>
+            </a:r>
+          </a:p>
+        </p:txBody>
+      </p:sp>
+      <p:sp>
+        <p:nvSpPr>
+          <p:cNvPr id="3" name="TextBox 2"/>
+          <p:cNvSpPr txBox="1"/>
+          <p:nvPr/>
+        </p:nvSpPr>
+        <p:spPr>
+          <a:xfrm>
+            <a:off x="1371600" y="2103120"/>
+            <a:ext cx="6400800" cy="640080"/>
+          </a:xfrm>
+          <a:prstGeom prst="rect">
+            <a:avLst/>
+          </a:prstGeom>
+          <a:noFill/>
+        </p:spPr>
+        <p:txBody>
+          <a:bodyPr wrap="square" anchor="t" lIns="0" rIns="0" tIns="0" bIns="0">
+            <a:spAutoFit/>
+          </a:bodyPr>
+          <a:lstStyle/>
+          <a:p>
+            <a:pPr algn="ctr">
+              <a:spcAft>
+                <a:spcPts val="400"/>
+              </a:spcAft>
+            </a:pPr>
+            <a:r>
+              <a:rPr sz="1500" b="0" i="0">
+                <a:solidFill>
+                  <a:srgbClr val="5B677D"/>
+                </a:solidFill>
+                <a:latin typeface="Arial"/>
+              </a:rPr>
+              <a:t>The team's internal auction app — enter the site code, pick your name, and every lot </a:t>
+            </a:r>
+            <a:r>
+              <a:rPr sz="1500" b="0" i="1">
+                <a:solidFill>
+                  <a:srgbClr val="5B677D"/>
+                </a:solidFill>
+                <a:latin typeface="Arial"/>
+              </a:rPr>
+              <a:t>you</a:t>
+            </a:r>
+            <a:r>
+              <a:rPr sz="1500" b="0" i="0">
+                <a:solidFill>
+                  <a:srgbClr val="5B677D"/>
+                </a:solidFill>
+                <a:latin typeface="Arial"/>
+              </a:rPr>
+              <a:t> care about finds you.</a:t>
+            </a:r>
+          </a:p>
+        </p:txBody>
+      </p:sp>
+      <p:sp>
+        <p:nvSpPr>
+          <p:cNvPr id="4" name="Rectangle 3"/>
+          <p:cNvSpPr/>
+          <p:nvPr/>
+        </p:nvSpPr>
+        <p:spPr>
+          <a:xfrm>
+            <a:off x="4251960" y="2880360"/>
+            <a:ext cx="640080" cy="31750"/>
+          </a:xfrm>
+          <a:prstGeom prst="rect">
+            <a:avLst/>
+          </a:prstGeom>
           <a:solidFill>
-            <a:srgbClr val="1F2A44"/>
+            <a:srgbClr val="1E3A8A"/>
           </a:solidFill>
           <a:ln>
             <a:noFill/>
           </a:ln>
-        </p:spPr>
-        <p:style>
-          <a:lnRef idx="1">
-            <a:schemeClr val="accent1"/>
-          </a:lnRef>
-          <a:fillRef idx="3">
-            <a:schemeClr val="accent1"/>
-          </a:fillRef>
-          <a:effectRef idx="2">
-            <a:schemeClr val="accent1"/>
-          </a:effectRef>
-          <a:fontRef idx="minor">
-            <a:schemeClr val="lt1"/>
-          </a:fontRef>
-        </p:style>
+          <a:effectLst/>
+        </p:spPr>
         <p:txBody>
           <a:bodyPr rtlCol="0" anchor="ctr"/>
           <a:lstStyle/>
@@ -3135,14 +3221,14 @@
       </p:sp>
       <p:sp>
         <p:nvSpPr>
-          <p:cNvPr id="3" name="TextBox 2"/>
+          <p:cNvPr id="5" name="TextBox 4"/>
           <p:cNvSpPr txBox="1"/>
           <p:nvPr/>
         </p:nvSpPr>
         <p:spPr>
           <a:xfrm>
-            <a:off x="457200" y="109728"/>
-            <a:ext cx="11277295" cy="320040"/>
+            <a:off x="457200" y="3108960"/>
+            <a:ext cx="8229600" cy="274320"/>
           </a:xfrm>
           <a:prstGeom prst="rect">
             <a:avLst/>
@@ -3150,38 +3236,47 @@
           <a:noFill/>
         </p:spPr>
         <p:txBody>
-          <a:bodyPr wrap="square" anchor="t" lIns="45720" rIns="45720" tIns="27432" bIns="27432">
+          <a:bodyPr wrap="square" anchor="t" lIns="0" rIns="0" tIns="0" bIns="0">
             <a:spAutoFit/>
           </a:bodyPr>
           <a:lstStyle/>
           <a:p>
-            <a:pPr>
-              <a:spcAft>
-                <a:spcPts val="600"/>
-              </a:spcAft>
-            </a:pPr>
-            <a:r>
-              <a:rPr sz="1200" b="0">
-                <a:solidFill>
-                  <a:srgbClr val="C9D3E6"/>
-                </a:solidFill>
-                <a:latin typeface="Calibri"/>
-              </a:rPr>
-              <a:t>1 · Overview</a:t>
-            </a:r>
-          </a:p>
-        </p:txBody>
-      </p:sp>
-      <p:sp>
-        <p:nvSpPr>
-          <p:cNvPr id="4" name="TextBox 3"/>
+            <a:pPr algn="ctr">
+              <a:spcAft>
+                <a:spcPts val="400"/>
+              </a:spcAft>
+            </a:pPr>
+            <a:r>
+              <a:rPr sz="1100" b="1" i="0">
+                <a:solidFill>
+                  <a:srgbClr val="111827"/>
+                </a:solidFill>
+                <a:latin typeface="Arial"/>
+              </a:rPr>
+              <a:t>Real Dream Team · Auction app</a:t>
+            </a:r>
+            <a:r>
+              <a:rPr sz="1100" b="0" i="0">
+                <a:solidFill>
+                  <a:srgbClr val="111827"/>
+                </a:solidFill>
+                <a:latin typeface="Arial"/>
+              </a:rPr>
+              <a:t> — Mark Porter + Devin</a:t>
+            </a:r>
+          </a:p>
+        </p:txBody>
+      </p:sp>
+      <p:sp>
+        <p:nvSpPr>
+          <p:cNvPr id="6" name="TextBox 5"/>
           <p:cNvSpPr txBox="1"/>
           <p:nvPr/>
         </p:nvSpPr>
         <p:spPr>
           <a:xfrm>
-            <a:off x="457200" y="384048"/>
-            <a:ext cx="11277295" cy="594360"/>
+            <a:off x="457200" y="3383280"/>
+            <a:ext cx="8229600" cy="274320"/>
           </a:xfrm>
           <a:prstGeom prst="rect">
             <a:avLst/>
@@ -3189,67 +3284,77 @@
           <a:noFill/>
         </p:spPr>
         <p:txBody>
-          <a:bodyPr wrap="square" anchor="t" lIns="45720" rIns="45720" tIns="27432" bIns="27432">
+          <a:bodyPr wrap="square" anchor="t" lIns="0" rIns="0" tIns="0" bIns="0">
             <a:spAutoFit/>
           </a:bodyPr>
           <a:lstStyle/>
           <a:p>
-            <a:pPr>
-              <a:spcAft>
-                <a:spcPts val="600"/>
-              </a:spcAft>
-            </a:pPr>
-            <a:r>
-              <a:rPr sz="2800" b="1">
-                <a:solidFill>
-                  <a:srgbClr val="FFFFFF"/>
-                </a:solidFill>
-                <a:latin typeface="Calibri"/>
-              </a:rPr>
-              <a:t>Real Dream Team — internal auction app</a:t>
-            </a:r>
-          </a:p>
-        </p:txBody>
-      </p:sp>
-      <p:pic>
-        <p:nvPicPr>
-          <p:cNvPr id="5" name="Picture 4" descr="mockup-summary.png"/>
-          <p:cNvPicPr>
-            <a:picLocks noChangeAspect="1"/>
-          </p:cNvPicPr>
-          <p:nvPr/>
-        </p:nvPicPr>
-        <p:blipFill>
-          <a:blip r:embed="rId2"/>
-          <a:stretch>
-            <a:fillRect/>
-          </a:stretch>
-        </p:blipFill>
-        <p:spPr>
-          <a:xfrm>
-            <a:off x="457200" y="1413510"/>
-            <a:ext cx="4572000" cy="4762500"/>
+            <a:pPr algn="ctr">
+              <a:spcAft>
+                <a:spcPts val="400"/>
+              </a:spcAft>
+            </a:pPr>
+            <a:r>
+              <a:rPr sz="850" b="0" i="0">
+                <a:solidFill>
+                  <a:srgbClr val="5B677D"/>
+                </a:solidFill>
+                <a:latin typeface="Courier New"/>
+              </a:rPr>
+              <a:t>github.com/COG-GTM/realdreamteam · rdt-auction.marklovestech.com · 20 PRs · Sep 14–15, 2026</a:t>
+            </a:r>
+          </a:p>
+        </p:txBody>
+      </p:sp>
+      <p:sp>
+        <p:nvSpPr>
+          <p:cNvPr id="7" name="TextBox 6"/>
+          <p:cNvSpPr txBox="1"/>
+          <p:nvPr/>
+        </p:nvSpPr>
+        <p:spPr>
+          <a:xfrm>
+            <a:off x="457200" y="4759452"/>
+            <a:ext cx="5486400" cy="182880"/>
           </a:xfrm>
           <a:prstGeom prst="rect">
             <a:avLst/>
           </a:prstGeom>
-          <a:ln w="9525">
-            <a:solidFill>
-              <a:srgbClr val="D0D4DA"/>
-            </a:solidFill>
-          </a:ln>
-        </p:spPr>
-      </p:pic>
-      <p:sp>
-        <p:nvSpPr>
-          <p:cNvPr id="6" name="TextBox 5"/>
+          <a:noFill/>
+        </p:spPr>
+        <p:txBody>
+          <a:bodyPr wrap="square" anchor="t" lIns="0" rIns="0" tIns="0" bIns="0">
+            <a:spAutoFit/>
+          </a:bodyPr>
+          <a:lstStyle/>
+          <a:p>
+            <a:pPr algn="l">
+              <a:spcAft>
+                <a:spcPts val="400"/>
+              </a:spcAft>
+            </a:pPr>
+            <a:r>
+              <a:rPr sz="750" b="0" i="0">
+                <a:solidFill>
+                  <a:srgbClr val="5B677D"/>
+                </a:solidFill>
+                <a:latin typeface="Courier New"/>
+              </a:rPr>
+              <a:t>Internal · Cognition GTM</a:t>
+            </a:r>
+          </a:p>
+        </p:txBody>
+      </p:sp>
+      <p:sp>
+        <p:nvSpPr>
+          <p:cNvPr id="8" name="TextBox 7"/>
           <p:cNvSpPr txBox="1"/>
           <p:nvPr/>
         </p:nvSpPr>
         <p:spPr>
           <a:xfrm>
-            <a:off x="457200" y="6172200"/>
-            <a:ext cx="4572000" cy="274320"/>
+            <a:off x="7315200" y="4759452"/>
+            <a:ext cx="1371600" cy="182880"/>
           </a:xfrm>
           <a:prstGeom prst="rect">
             <a:avLst/>
@@ -3257,198 +3362,24 @@
           <a:noFill/>
         </p:spPr>
         <p:txBody>
-          <a:bodyPr wrap="square" anchor="t" lIns="45720" rIns="45720" tIns="27432" bIns="27432">
+          <a:bodyPr wrap="square" anchor="t" lIns="0" rIns="0" tIns="0" bIns="0">
             <a:spAutoFit/>
           </a:bodyPr>
           <a:lstStyle/>
           <a:p>
-            <a:pPr>
-              <a:spcAft>
-                <a:spcPts val="600"/>
-              </a:spcAft>
-            </a:pPr>
-            <a:r>
-              <a:rPr sz="1000" b="0">
-                <a:solidFill>
-                  <a:srgbClr val="5F6368"/>
-                </a:solidFill>
-                <a:latin typeface="Calibri"/>
-              </a:rPr>
-              <a:t>Summary page (docs/mockup-summary.html)</a:t>
-            </a:r>
-          </a:p>
-        </p:txBody>
-      </p:sp>
-      <p:sp>
-        <p:nvSpPr>
-          <p:cNvPr id="7" name="TextBox 6"/>
-          <p:cNvSpPr txBox="1"/>
-          <p:nvPr/>
-        </p:nvSpPr>
-        <p:spPr>
-          <a:xfrm>
-            <a:off x="5394960" y="1280160"/>
-            <a:ext cx="6339535" cy="5029200"/>
-          </a:xfrm>
-          <a:prstGeom prst="rect">
-            <a:avLst/>
-          </a:prstGeom>
-          <a:noFill/>
-        </p:spPr>
-        <p:txBody>
-          <a:bodyPr wrap="square" anchor="t" lIns="45720" rIns="45720" tIns="27432" bIns="27432">
-            <a:spAutoFit/>
-          </a:bodyPr>
-          <a:lstStyle/>
-          <a:p>
-            <a:pPr>
-              <a:spcAft>
-                <a:spcPts val="1000"/>
-              </a:spcAft>
-            </a:pPr>
-            <a:r>
-              <a:rPr sz="1400" b="1">
-                <a:solidFill>
-                  <a:srgbClr val="B45F06"/>
-                </a:solidFill>
-                <a:latin typeface="Calibri"/>
-              </a:rPr>
-              <a:t>Live at rdt-auction.marklovestech.com</a:t>
-            </a:r>
-          </a:p>
-          <a:p>
-            <a:pPr>
-              <a:spcAft>
-                <a:spcPts val="900"/>
-              </a:spcAft>
-            </a:pPr>
-            <a:r>
-              <a:rPr sz="1600" b="0">
-                <a:solidFill>
-                  <a:srgbClr val="222222"/>
-                </a:solidFill>
-                <a:latin typeface="Calibri"/>
-              </a:rPr>
-              <a:t>•  Sign in: site code entry + name picker</a:t>
-            </a:r>
-          </a:p>
-          <a:p>
-            <a:pPr>
-              <a:spcAft>
-                <a:spcPts val="900"/>
-              </a:spcAft>
-            </a:pPr>
-            <a:r>
-              <a:rPr sz="1600" b="0">
-                <a:solidFill>
-                  <a:srgbClr val="222222"/>
-                </a:solidFill>
-                <a:latin typeface="Calibri"/>
-              </a:rPr>
-              <a:t>•  Summary: Notifications, “Matches your interests”, and Discover (5 random open lots)</a:t>
-            </a:r>
-          </a:p>
-          <a:p>
-            <a:pPr>
-              <a:spcAft>
-                <a:spcPts val="900"/>
-              </a:spcAft>
-            </a:pPr>
-            <a:r>
-              <a:rPr sz="1600" b="0">
-                <a:solidFill>
-                  <a:srgbClr val="222222"/>
-                </a:solidFill>
-                <a:latin typeface="Calibri"/>
-              </a:rPr>
-              <a:t>•  Browse auctions and lots, ★ favorite, place whole-number bids that must beat the high bid</a:t>
-            </a:r>
-          </a:p>
-          <a:p>
-            <a:pPr>
-              <a:spcAft>
-                <a:spcPts val="900"/>
-              </a:spcAft>
-            </a:pPr>
-            <a:r>
-              <a:rPr sz="1600" b="0">
-                <a:solidFill>
-                  <a:srgbClr val="222222"/>
-                </a:solidFill>
-                <a:latin typeface="Calibri"/>
-              </a:rPr>
-              <a:t>•  Interest matching by category / artist / keyword, with “why it matched” chips</a:t>
-            </a:r>
-          </a:p>
-          <a:p>
-            <a:pPr>
-              <a:spcAft>
-                <a:spcPts val="900"/>
-              </a:spcAft>
-            </a:pPr>
-            <a:r>
-              <a:rPr sz="1600" b="0">
-                <a:solidFill>
-                  <a:srgbClr val="222222"/>
-                </a:solidFill>
-                <a:latin typeface="Calibri"/>
-              </a:rPr>
-              <a:t>•  Auction close → SOLD ribbon, hammer price, winner, sound, Won/Lost notifications</a:t>
-            </a:r>
-          </a:p>
-          <a:p>
-            <a:pPr>
-              <a:spcAft>
-                <a:spcPts val="900"/>
-              </a:spcAft>
-            </a:pPr>
-            <a:r>
-              <a:rPr sz="1600" b="0">
-                <a:solidFill>
-                  <a:srgbClr val="222222"/>
-                </a:solidFill>
-                <a:latin typeface="Calibri"/>
-              </a:rPr>
-              <a:t>•  /admin (second code): add lots, edit close times, close/reopen auctions, ban users</a:t>
-            </a:r>
-          </a:p>
-        </p:txBody>
-      </p:sp>
-      <p:sp>
-        <p:nvSpPr>
-          <p:cNvPr id="8" name="TextBox 7"/>
-          <p:cNvSpPr txBox="1"/>
-          <p:nvPr/>
-        </p:nvSpPr>
-        <p:spPr>
-          <a:xfrm>
-            <a:off x="457200" y="6446520"/>
-            <a:ext cx="11277295" cy="274320"/>
-          </a:xfrm>
-          <a:prstGeom prst="rect">
-            <a:avLst/>
-          </a:prstGeom>
-          <a:noFill/>
-        </p:spPr>
-        <p:txBody>
-          <a:bodyPr wrap="square" anchor="t" lIns="45720" rIns="45720" tIns="27432" bIns="27432">
-            <a:spAutoFit/>
-          </a:bodyPr>
-          <a:lstStyle/>
-          <a:p>
-            <a:pPr>
-              <a:spcAft>
-                <a:spcPts val="600"/>
-              </a:spcAft>
-            </a:pPr>
-            <a:r>
-              <a:rPr sz="900" b="0">
-                <a:solidFill>
-                  <a:srgbClr val="5F6368"/>
-                </a:solidFill>
-                <a:latin typeface="Calibri"/>
-              </a:rPr>
-              <a:t>COG-GTM/realdreamteam  ·  docs/generate_overview_deck.py  ·  1/3</a:t>
+            <a:pPr algn="r">
+              <a:spcAft>
+                <a:spcPts val="400"/>
+              </a:spcAft>
+            </a:pPr>
+            <a:r>
+              <a:rPr sz="750" b="0" i="0">
+                <a:solidFill>
+                  <a:srgbClr val="5B677D"/>
+                </a:solidFill>
+                <a:latin typeface="Courier New"/>
+              </a:rPr>
+              <a:t>1 / 6</a:t>
             </a:r>
           </a:p>
         </p:txBody>
@@ -3473,44 +3404,40 @@
       <p:grpSpPr/>
       <p:sp>
         <p:nvSpPr>
-          <p:cNvPr id="2" name="Rectangle 1"/>
-          <p:cNvSpPr/>
-          <p:nvPr/>
-        </p:nvSpPr>
-        <p:spPr>
-          <a:xfrm>
-            <a:off x="0" y="0"/>
-            <a:ext cx="12191695" cy="1051560"/>
+          <p:cNvPr id="2" name="TextBox 1"/>
+          <p:cNvSpPr txBox="1"/>
+          <p:nvPr/>
+        </p:nvSpPr>
+        <p:spPr>
+          <a:xfrm>
+            <a:off x="457200" y="292608"/>
+            <a:ext cx="8229600" cy="228600"/>
           </a:xfrm>
           <a:prstGeom prst="rect">
             <a:avLst/>
           </a:prstGeom>
-          <a:solidFill>
-            <a:srgbClr val="1F2A44"/>
-          </a:solidFill>
-          <a:ln>
-            <a:noFill/>
-          </a:ln>
-        </p:spPr>
-        <p:style>
-          <a:lnRef idx="1">
-            <a:schemeClr val="accent1"/>
-          </a:lnRef>
-          <a:fillRef idx="3">
-            <a:schemeClr val="accent1"/>
-          </a:fillRef>
-          <a:effectRef idx="2">
-            <a:schemeClr val="accent1"/>
-          </a:effectRef>
-          <a:fontRef idx="minor">
-            <a:schemeClr val="lt1"/>
-          </a:fontRef>
-        </p:style>
-        <p:txBody>
-          <a:bodyPr rtlCol="0" anchor="ctr"/>
-          <a:lstStyle/>
-          <a:p>
-            <a:pPr algn="ctr"/>
+          <a:noFill/>
+        </p:spPr>
+        <p:txBody>
+          <a:bodyPr wrap="square" anchor="t" lIns="0" rIns="0" tIns="0" bIns="0">
+            <a:spAutoFit/>
+          </a:bodyPr>
+          <a:lstStyle/>
+          <a:p>
+            <a:pPr algn="l">
+              <a:spcAft>
+                <a:spcPts val="400"/>
+              </a:spcAft>
+            </a:pPr>
+            <a:r>
+              <a:rPr sz="800" b="0" i="0">
+                <a:solidFill>
+                  <a:srgbClr val="4F5F8F"/>
+                </a:solidFill>
+                <a:latin typeface="Courier New"/>
+              </a:rPr>
+              <a:t>THE ORIGINAL PLAN</a:t>
+            </a:r>
           </a:p>
         </p:txBody>
       </p:sp>
@@ -3522,8 +3449,8 @@
         </p:nvSpPr>
         <p:spPr>
           <a:xfrm>
-            <a:off x="457200" y="109728"/>
-            <a:ext cx="11277295" cy="320040"/>
+            <a:off x="457200" y="502920"/>
+            <a:ext cx="8229600" cy="411480"/>
           </a:xfrm>
           <a:prstGeom prst="rect">
             <a:avLst/>
@@ -3531,24 +3458,24 @@
           <a:noFill/>
         </p:spPr>
         <p:txBody>
-          <a:bodyPr wrap="square" anchor="t" lIns="45720" rIns="45720" tIns="27432" bIns="27432">
+          <a:bodyPr wrap="square" anchor="t" lIns="0" rIns="0" tIns="0" bIns="0">
             <a:spAutoFit/>
           </a:bodyPr>
           <a:lstStyle/>
           <a:p>
-            <a:pPr>
-              <a:spcAft>
-                <a:spcPts val="600"/>
-              </a:spcAft>
-            </a:pPr>
-            <a:r>
-              <a:rPr sz="1200" b="0">
-                <a:solidFill>
-                  <a:srgbClr val="C9D3E6"/>
-                </a:solidFill>
-                <a:latin typeface="Calibri"/>
-              </a:rPr>
-              <a:t>2 · Three moving parts, all always on</a:t>
+            <a:pPr algn="l">
+              <a:spcAft>
+                <a:spcPts val="400"/>
+              </a:spcAft>
+            </a:pPr>
+            <a:r>
+              <a:rPr sz="2200" b="1" i="0">
+                <a:solidFill>
+                  <a:srgbClr val="111827"/>
+                </a:solidFill>
+                <a:latin typeface="Arial"/>
+              </a:rPr>
+              <a:t>A live auction app for the team, built in under 12 hours</a:t>
             </a:r>
           </a:p>
         </p:txBody>
@@ -3561,8 +3488,8 @@
         </p:nvSpPr>
         <p:spPr>
           <a:xfrm>
-            <a:off x="457200" y="384048"/>
-            <a:ext cx="11277295" cy="594360"/>
+            <a:off x="457200" y="914400"/>
+            <a:ext cx="8229600" cy="457200"/>
           </a:xfrm>
           <a:prstGeom prst="rect">
             <a:avLst/>
@@ -3570,67 +3497,177 @@
           <a:noFill/>
         </p:spPr>
         <p:txBody>
-          <a:bodyPr wrap="square" anchor="t" lIns="45720" rIns="45720" tIns="27432" bIns="27432">
+          <a:bodyPr wrap="square" anchor="t" lIns="0" rIns="0" tIns="0" bIns="0">
             <a:spAutoFit/>
           </a:bodyPr>
           <a:lstStyle/>
           <a:p>
-            <a:pPr>
-              <a:spcAft>
-                <a:spcPts val="600"/>
-              </a:spcAft>
-            </a:pPr>
-            <a:r>
-              <a:rPr sz="2800" b="1">
-                <a:solidFill>
-                  <a:srgbClr val="FFFFFF"/>
-                </a:solidFill>
-                <a:latin typeface="Calibri"/>
-              </a:rPr>
-              <a:t>Architecture</a:t>
-            </a:r>
-          </a:p>
-        </p:txBody>
-      </p:sp>
-      <p:pic>
-        <p:nvPicPr>
-          <p:cNvPr id="5" name="Picture 4" descr="architecture.png"/>
-          <p:cNvPicPr>
-            <a:picLocks noChangeAspect="1"/>
-          </p:cNvPicPr>
-          <p:nvPr/>
-        </p:nvPicPr>
-        <p:blipFill>
-          <a:blip r:embed="rId2"/>
-          <a:stretch>
-            <a:fillRect/>
-          </a:stretch>
-        </p:blipFill>
-        <p:spPr>
-          <a:xfrm>
-            <a:off x="457200" y="1240747"/>
-            <a:ext cx="11277295" cy="2273385"/>
+            <a:pPr algn="l">
+              <a:spcAft>
+                <a:spcPts val="400"/>
+              </a:spcAft>
+            </a:pPr>
+            <a:r>
+              <a:rPr sz="1100" b="0" i="0">
+                <a:solidFill>
+                  <a:srgbClr val="5B677D"/>
+                </a:solidFill>
+                <a:latin typeface="Arial"/>
+              </a:rPr>
+              <a:t>One always-on URL the whole team can open at once — bid against each other, get matched to lots they care about, and watch an auction close live during the demo.</a:t>
+            </a:r>
+          </a:p>
+        </p:txBody>
+      </p:sp>
+      <p:sp>
+        <p:nvSpPr>
+          <p:cNvPr id="5" name="Rounded Rectangle 4"/>
+          <p:cNvSpPr/>
+          <p:nvPr/>
+        </p:nvSpPr>
+        <p:spPr>
+          <a:xfrm>
+            <a:off x="457200" y="1463040"/>
+            <a:ext cx="2651760" cy="2606040"/>
+          </a:xfrm>
+          <a:prstGeom prst="roundRect">
+            <a:avLst>
+              <a:gd name="adj" fmla="val 4000"/>
+            </a:avLst>
+          </a:prstGeom>
+          <a:solidFill>
+            <a:srgbClr val="FAFBFC"/>
+          </a:solidFill>
+          <a:ln w="9525">
+            <a:solidFill>
+              <a:srgbClr val="E3E7EE"/>
+            </a:solidFill>
+          </a:ln>
+          <a:effectLst/>
+        </p:spPr>
+        <p:txBody>
+          <a:bodyPr rtlCol="0" anchor="ctr"/>
+          <a:lstStyle/>
+          <a:p>
+            <a:pPr algn="ctr"/>
+          </a:p>
+        </p:txBody>
+      </p:sp>
+      <p:sp>
+        <p:nvSpPr>
+          <p:cNvPr id="6" name="TextBox 5"/>
+          <p:cNvSpPr txBox="1"/>
+          <p:nvPr/>
+        </p:nvSpPr>
+        <p:spPr>
+          <a:xfrm>
+            <a:off x="594360" y="1600200"/>
+            <a:ext cx="2377440" cy="2331720"/>
           </a:xfrm>
           <a:prstGeom prst="rect">
             <a:avLst/>
           </a:prstGeom>
+          <a:noFill/>
+        </p:spPr>
+        <p:txBody>
+          <a:bodyPr wrap="square" anchor="t" lIns="0" rIns="0" tIns="0" bIns="0">
+            <a:spAutoFit/>
+          </a:bodyPr>
+          <a:lstStyle/>
+          <a:p>
+            <a:pPr algn="l">
+              <a:spcAft>
+                <a:spcPts val="500"/>
+              </a:spcAft>
+            </a:pPr>
+            <a:r>
+              <a:rPr sz="1100" b="1" i="0">
+                <a:solidFill>
+                  <a:srgbClr val="111827"/>
+                </a:solidFill>
+                <a:latin typeface="Arial"/>
+              </a:rPr>
+              <a:t>Who it is for</a:t>
+            </a:r>
+          </a:p>
+          <a:p>
+            <a:pPr algn="l">
+              <a:spcAft>
+                <a:spcPts val="400"/>
+              </a:spcAft>
+            </a:pPr>
+            <a:r>
+              <a:rPr sz="950" b="0" i="0">
+                <a:solidFill>
+                  <a:srgbClr val="111827"/>
+                </a:solidFill>
+                <a:latin typeface="Arial"/>
+              </a:rPr>
+              <a:t>The Real Dream Team — 28 team members signing in from their own browsers with one shared site code and a name picker. Admins hold a second code.</a:t>
+            </a:r>
+          </a:p>
+          <a:p>
+            <a:pPr algn="l">
+              <a:spcAft>
+                <a:spcPts val="0"/>
+              </a:spcAft>
+            </a:pPr>
+            <a:r>
+              <a:rPr sz="950" b="0" i="0">
+                <a:solidFill>
+                  <a:srgbClr val="111827"/>
+                </a:solidFill>
+                <a:latin typeface="Arial"/>
+              </a:rPr>
+              <a:t>Nothing runs on a laptop: one Node process on EC2 plus a shared Supabase Postgres, both up 24/7.</a:t>
+            </a:r>
+          </a:p>
+        </p:txBody>
+      </p:sp>
+      <p:sp>
+        <p:nvSpPr>
+          <p:cNvPr id="7" name="Rounded Rectangle 6"/>
+          <p:cNvSpPr/>
+          <p:nvPr/>
+        </p:nvSpPr>
+        <p:spPr>
+          <a:xfrm>
+            <a:off x="3246120" y="1463040"/>
+            <a:ext cx="2651760" cy="2606040"/>
+          </a:xfrm>
+          <a:prstGeom prst="roundRect">
+            <a:avLst>
+              <a:gd name="adj" fmla="val 4000"/>
+            </a:avLst>
+          </a:prstGeom>
+          <a:solidFill>
+            <a:srgbClr val="FAFBFC"/>
+          </a:solidFill>
           <a:ln w="9525">
             <a:solidFill>
-              <a:srgbClr val="D0D4DA"/>
+              <a:srgbClr val="E3E7EE"/>
             </a:solidFill>
           </a:ln>
-        </p:spPr>
-      </p:pic>
-      <p:sp>
-        <p:nvSpPr>
-          <p:cNvPr id="6" name="TextBox 5"/>
+          <a:effectLst/>
+        </p:spPr>
+        <p:txBody>
+          <a:bodyPr rtlCol="0" anchor="ctr"/>
+          <a:lstStyle/>
+          <a:p>
+            <a:pPr algn="ctr"/>
+          </a:p>
+        </p:txBody>
+      </p:sp>
+      <p:sp>
+        <p:nvSpPr>
+          <p:cNvPr id="8" name="TextBox 7"/>
           <p:cNvSpPr txBox="1"/>
           <p:nvPr/>
         </p:nvSpPr>
         <p:spPr>
           <a:xfrm>
-            <a:off x="457200" y="3566160"/>
-            <a:ext cx="11277295" cy="274320"/>
+            <a:off x="3383280" y="1600200"/>
+            <a:ext cx="2377440" cy="2331720"/>
           </a:xfrm>
           <a:prstGeom prst="rect">
             <a:avLst/>
@@ -3638,38 +3675,184 @@
           <a:noFill/>
         </p:spPr>
         <p:txBody>
-          <a:bodyPr wrap="square" anchor="t" lIns="45720" rIns="45720" tIns="27432" bIns="27432">
+          <a:bodyPr wrap="square" anchor="t" lIns="0" rIns="0" tIns="0" bIns="0">
             <a:spAutoFit/>
           </a:bodyPr>
           <a:lstStyle/>
           <a:p>
-            <a:pPr>
-              <a:spcAft>
-                <a:spcPts val="600"/>
-              </a:spcAft>
-            </a:pPr>
-            <a:r>
-              <a:rPr sz="1000" b="0">
-                <a:solidFill>
-                  <a:srgbClr val="5F6368"/>
-                </a:solidFill>
-                <a:latin typeface="Calibri"/>
-              </a:rPr>
-              <a:t>docs/architecture.mmd, rendered with mermaid-cli</a:t>
-            </a:r>
-          </a:p>
-        </p:txBody>
-      </p:sp>
-      <p:sp>
-        <p:nvSpPr>
-          <p:cNvPr id="7" name="TextBox 6"/>
+            <a:pPr algn="l">
+              <a:spcAft>
+                <a:spcPts val="500"/>
+              </a:spcAft>
+            </a:pPr>
+            <a:r>
+              <a:rPr sz="1100" b="1" i="0">
+                <a:solidFill>
+                  <a:srgbClr val="111827"/>
+                </a:solidFill>
+                <a:latin typeface="Arial"/>
+              </a:rPr>
+              <a:t>Must-have scope (the 8 demo beats)</a:t>
+            </a:r>
+          </a:p>
+          <a:p>
+            <a:pPr algn="l">
+              <a:spcAft>
+                <a:spcPts val="300"/>
+              </a:spcAft>
+            </a:pPr>
+            <a:r>
+              <a:rPr sz="850" b="0" i="0">
+                <a:solidFill>
+                  <a:srgbClr val="111827"/>
+                </a:solidFill>
+                <a:latin typeface="Arial"/>
+              </a:rPr>
+              <a:t>•  Access code → user picker → summary with Matches + Discover</a:t>
+            </a:r>
+          </a:p>
+          <a:p>
+            <a:pPr algn="l">
+              <a:spcAft>
+                <a:spcPts val="300"/>
+              </a:spcAft>
+            </a:pPr>
+            <a:r>
+              <a:rPr sz="850" b="0" i="0">
+                <a:solidFill>
+                  <a:srgbClr val="111827"/>
+                </a:solidFill>
+                <a:latin typeface="Arial"/>
+              </a:rPr>
+              <a:t>•  Preferences change → matches change</a:t>
+            </a:r>
+          </a:p>
+          <a:p>
+            <a:pPr algn="l">
+              <a:spcAft>
+                <a:spcPts val="300"/>
+              </a:spcAft>
+            </a:pPr>
+            <a:r>
+              <a:rPr sz="850" b="0" i="0">
+                <a:solidFill>
+                  <a:srgbClr val="111827"/>
+                </a:solidFill>
+                <a:latin typeface="Arial"/>
+              </a:rPr>
+              <a:t>•  Browse auctions and lot detail with bid history</a:t>
+            </a:r>
+          </a:p>
+          <a:p>
+            <a:pPr algn="l">
+              <a:spcAft>
+                <a:spcPts val="300"/>
+              </a:spcAft>
+            </a:pPr>
+            <a:r>
+              <a:rPr sz="850" b="0" i="0">
+                <a:solidFill>
+                  <a:srgbClr val="111827"/>
+                </a:solidFill>
+                <a:latin typeface="Arial"/>
+              </a:rPr>
+              <a:t>•  Two users bid on one lot; low bids rejected</a:t>
+            </a:r>
+          </a:p>
+          <a:p>
+            <a:pPr algn="l">
+              <a:spcAft>
+                <a:spcPts val="300"/>
+              </a:spcAft>
+            </a:pPr>
+            <a:r>
+              <a:rPr sz="850" b="0" i="0">
+                <a:solidFill>
+                  <a:srgbClr val="111827"/>
+                </a:solidFill>
+                <a:latin typeface="Arial"/>
+              </a:rPr>
+              <a:t>•  Admin adds a lot → matching users get notified</a:t>
+            </a:r>
+          </a:p>
+          <a:p>
+            <a:pPr algn="l">
+              <a:spcAft>
+                <a:spcPts val="300"/>
+              </a:spcAft>
+            </a:pPr>
+            <a:r>
+              <a:rPr sz="850" b="0" i="0">
+                <a:solidFill>
+                  <a:srgbClr val="111827"/>
+                </a:solidFill>
+                <a:latin typeface="Arial"/>
+              </a:rPr>
+              <a:t>•  Outbid notification; History of bids and favorites</a:t>
+            </a:r>
+          </a:p>
+          <a:p>
+            <a:pPr algn="l">
+              <a:spcAft>
+                <a:spcPts val="300"/>
+              </a:spcAft>
+            </a:pPr>
+            <a:r>
+              <a:rPr sz="850" b="0" i="0">
+                <a:solidFill>
+                  <a:srgbClr val="111827"/>
+                </a:solidFill>
+                <a:latin typeface="Arial"/>
+              </a:rPr>
+              <a:t>•  Auction closes → SOLD, hammer price, sound</a:t>
+            </a:r>
+          </a:p>
+        </p:txBody>
+      </p:sp>
+      <p:sp>
+        <p:nvSpPr>
+          <p:cNvPr id="9" name="Rounded Rectangle 8"/>
+          <p:cNvSpPr/>
+          <p:nvPr/>
+        </p:nvSpPr>
+        <p:spPr>
+          <a:xfrm>
+            <a:off x="6035040" y="1463040"/>
+            <a:ext cx="2651760" cy="2606040"/>
+          </a:xfrm>
+          <a:prstGeom prst="roundRect">
+            <a:avLst>
+              <a:gd name="adj" fmla="val 4000"/>
+            </a:avLst>
+          </a:prstGeom>
+          <a:solidFill>
+            <a:srgbClr val="FAFBFC"/>
+          </a:solidFill>
+          <a:ln w="9525">
+            <a:solidFill>
+              <a:srgbClr val="E3E7EE"/>
+            </a:solidFill>
+          </a:ln>
+          <a:effectLst/>
+        </p:spPr>
+        <p:txBody>
+          <a:bodyPr rtlCol="0" anchor="ctr"/>
+          <a:lstStyle/>
+          <a:p>
+            <a:pPr algn="ctr"/>
+          </a:p>
+        </p:txBody>
+      </p:sp>
+      <p:sp>
+        <p:nvSpPr>
+          <p:cNvPr id="10" name="TextBox 9"/>
           <p:cNvSpPr txBox="1"/>
           <p:nvPr/>
         </p:nvSpPr>
         <p:spPr>
           <a:xfrm>
-            <a:off x="457200" y="3977640"/>
-            <a:ext cx="5455767" cy="2377440"/>
+            <a:off x="6172200" y="1600200"/>
+            <a:ext cx="2377440" cy="2331720"/>
           </a:xfrm>
           <a:prstGeom prst="rect">
             <a:avLst/>
@@ -3677,102 +3860,118 @@
           <a:noFill/>
         </p:spPr>
         <p:txBody>
-          <a:bodyPr wrap="square" anchor="t" lIns="45720" rIns="45720" tIns="27432" bIns="27432">
+          <a:bodyPr wrap="square" anchor="t" lIns="0" rIns="0" tIns="0" bIns="0">
             <a:spAutoFit/>
           </a:bodyPr>
           <a:lstStyle/>
           <a:p>
-            <a:pPr>
-              <a:spcAft>
-                <a:spcPts val="800"/>
-              </a:spcAft>
-            </a:pPr>
-            <a:r>
-              <a:rPr sz="1500" b="1">
-                <a:solidFill>
-                  <a:srgbClr val="B45F06"/>
-                </a:solidFill>
-                <a:latin typeface="Calibri"/>
-              </a:rPr>
-              <a:t>Stack</a:t>
-            </a:r>
-          </a:p>
-          <a:p>
-            <a:pPr>
-              <a:spcAft>
-                <a:spcPts val="900"/>
-              </a:spcAft>
-            </a:pPr>
-            <a:r>
-              <a:rPr sz="1400" b="0">
-                <a:solidFill>
-                  <a:srgbClr val="222222"/>
-                </a:solidFill>
-                <a:latin typeface="Calibri"/>
-              </a:rPr>
-              <a:t>•  Node.js 20 + Express + EJS + hand-written SQL (pg)</a:t>
-            </a:r>
-          </a:p>
-          <a:p>
-            <a:pPr>
-              <a:spcAft>
-                <a:spcPts val="900"/>
-              </a:spcAft>
-            </a:pPr>
-            <a:r>
-              <a:rPr sz="1400" b="0">
-                <a:solidFill>
-                  <a:srgbClr val="222222"/>
-                </a:solidFill>
-                <a:latin typeface="Calibri"/>
-              </a:rPr>
-              <a:t>•  No build step, no frontend framework, no API layer — server renders HTML</a:t>
-            </a:r>
-          </a:p>
-          <a:p>
-            <a:pPr>
-              <a:spcAft>
-                <a:spcPts val="900"/>
-              </a:spcAft>
-            </a:pPr>
-            <a:r>
-              <a:rPr sz="1400" b="0">
-                <a:solidFill>
-                  <a:srgbClr val="222222"/>
-                </a:solidFill>
-                <a:latin typeface="Calibri"/>
-              </a:rPr>
-              <a:t>•  Stateless Node process managed by systemd, with a 5 s poller that closes auctions</a:t>
-            </a:r>
-          </a:p>
-          <a:p>
-            <a:pPr>
-              <a:spcAft>
-                <a:spcPts val="900"/>
-              </a:spcAft>
-            </a:pPr>
-            <a:r>
-              <a:rPr sz="1400" b="0">
-                <a:solidFill>
-                  <a:srgbClr val="222222"/>
-                </a:solidFill>
-                <a:latin typeface="Calibri"/>
-              </a:rPr>
-              <a:t>•  All state lives in Postgres; npm run db:reset reloads data/seed/*.json</a:t>
-            </a:r>
-          </a:p>
-        </p:txBody>
-      </p:sp>
-      <p:sp>
-        <p:nvSpPr>
-          <p:cNvPr id="8" name="TextBox 7"/>
+            <a:pPr algn="l">
+              <a:spcAft>
+                <a:spcPts val="500"/>
+              </a:spcAft>
+            </a:pPr>
+            <a:r>
+              <a:rPr sz="1100" b="1" i="0">
+                <a:solidFill>
+                  <a:srgbClr val="111827"/>
+                </a:solidFill>
+                <a:latin typeface="Arial"/>
+              </a:rPr>
+              <a:t>Definition of done</a:t>
+            </a:r>
+          </a:p>
+          <a:p>
+            <a:pPr algn="l">
+              <a:spcAft>
+                <a:spcPts val="400"/>
+              </a:spcAft>
+            </a:pPr>
+            <a:r>
+              <a:rPr sz="900" b="0" i="0">
+                <a:solidFill>
+                  <a:srgbClr val="111827"/>
+                </a:solidFill>
+                <a:latin typeface="Arial"/>
+              </a:rPr>
+              <a:t>•  Node 20 · Express · EJS · pg, ~6 dependencies, no build step</a:t>
+            </a:r>
+          </a:p>
+          <a:p>
+            <a:pPr algn="l">
+              <a:spcAft>
+                <a:spcPts val="400"/>
+              </a:spcAft>
+            </a:pPr>
+            <a:r>
+              <a:rPr sz="900" b="0" i="0">
+                <a:solidFill>
+                  <a:srgbClr val="111827"/>
+                </a:solidFill>
+                <a:latin typeface="Arial"/>
+              </a:rPr>
+              <a:t>•  Data model frozen in db/schema.sql (#34)</a:t>
+            </a:r>
+          </a:p>
+          <a:p>
+            <a:pPr algn="l">
+              <a:spcAft>
+                <a:spcPts val="400"/>
+              </a:spcAft>
+            </a:pPr>
+            <a:r>
+              <a:rPr sz="900" b="0" i="0">
+                <a:solidFill>
+                  <a:srgbClr val="111827"/>
+                </a:solidFill>
+                <a:latin typeface="Arial"/>
+              </a:rPr>
+              <a:t>•  Each step = one reviewed PR with screenshots</a:t>
+            </a:r>
+          </a:p>
+          <a:p>
+            <a:pPr algn="l">
+              <a:spcAft>
+                <a:spcPts val="400"/>
+              </a:spcAft>
+            </a:pPr>
+            <a:r>
+              <a:rPr sz="900" b="0" i="0">
+                <a:solidFill>
+                  <a:srgbClr val="111827"/>
+                </a:solidFill>
+                <a:latin typeface="Arial"/>
+              </a:rPr>
+              <a:t>•  Deployed behind a public URL under systemd</a:t>
+            </a:r>
+          </a:p>
+          <a:p>
+            <a:pPr algn="l">
+              <a:spcAft>
+                <a:spcPts val="0"/>
+              </a:spcAft>
+            </a:pPr>
+            <a:r>
+              <a:rPr sz="900" b="0" i="0">
+                <a:solidFill>
+                  <a:srgbClr val="5B677D"/>
+                </a:solidFill>
+                <a:latin typeface="Arial"/>
+              </a:rPr>
+              <a:t>Left out on purpose: search, pagination, lot editing, realtime push.</a:t>
+            </a:r>
+          </a:p>
+        </p:txBody>
+      </p:sp>
+      <p:sp>
+        <p:nvSpPr>
+          <p:cNvPr id="11" name="TextBox 10"/>
           <p:cNvSpPr txBox="1"/>
           <p:nvPr/>
         </p:nvSpPr>
         <p:spPr>
           <a:xfrm>
-            <a:off x="6278727" y="3977640"/>
-            <a:ext cx="5455767" cy="2377440"/>
+            <a:off x="457200" y="4160520"/>
+            <a:ext cx="8229600" cy="457200"/>
           </a:xfrm>
           <a:prstGeom prst="rect">
             <a:avLst/>
@@ -3780,102 +3979,38 @@
           <a:noFill/>
         </p:spPr>
         <p:txBody>
-          <a:bodyPr wrap="square" anchor="t" lIns="45720" rIns="45720" tIns="27432" bIns="27432">
+          <a:bodyPr wrap="square" anchor="t" lIns="0" rIns="0" tIns="0" bIns="0">
             <a:spAutoFit/>
           </a:bodyPr>
           <a:lstStyle/>
           <a:p>
-            <a:pPr>
-              <a:spcAft>
-                <a:spcPts val="800"/>
-              </a:spcAft>
-            </a:pPr>
-            <a:r>
-              <a:rPr sz="1500" b="1">
-                <a:solidFill>
-                  <a:srgbClr val="B45F06"/>
-                </a:solidFill>
-                <a:latin typeface="Calibri"/>
-              </a:rPr>
-              <a:t>Request flow</a:t>
-            </a:r>
-          </a:p>
-          <a:p>
-            <a:pPr>
-              <a:spcAft>
-                <a:spcPts val="900"/>
-              </a:spcAft>
-            </a:pPr>
-            <a:r>
-              <a:rPr sz="1400" b="0">
-                <a:solidFill>
-                  <a:srgbClr val="222222"/>
-                </a:solidFill>
-                <a:latin typeface="Calibri"/>
-              </a:rPr>
-              <a:t>•  IONOS DNS → EC2 instance</a:t>
-            </a:r>
-          </a:p>
-          <a:p>
-            <a:pPr>
-              <a:spcAft>
-                <a:spcPts val="900"/>
-              </a:spcAft>
-            </a:pPr>
-            <a:r>
-              <a:rPr sz="1400" b="0">
-                <a:solidFill>
-                  <a:srgbClr val="222222"/>
-                </a:solidFill>
-                <a:latin typeface="Calibri"/>
-              </a:rPr>
-              <a:t>•  Caddy terminates TLS on 80/443 (Let’s Encrypt) → Node on :3000</a:t>
-            </a:r>
-          </a:p>
-          <a:p>
-            <a:pPr>
-              <a:spcAft>
-                <a:spcPts val="900"/>
-              </a:spcAft>
-            </a:pPr>
-            <a:r>
-              <a:rPr sz="1400" b="0">
-                <a:solidFill>
-                  <a:srgbClr val="222222"/>
-                </a:solidFill>
-                <a:latin typeface="Calibri"/>
-              </a:rPr>
-              <a:t>•  Node runs SQL against Supabase Postgres → returns plain HTML</a:t>
-            </a:r>
-          </a:p>
-          <a:p>
-            <a:pPr>
-              <a:spcAft>
-                <a:spcPts val="900"/>
-              </a:spcAft>
-            </a:pPr>
-            <a:r>
-              <a:rPr sz="1400" b="0">
-                <a:solidFill>
-                  <a:srgbClr val="222222"/>
-                </a:solidFill>
-                <a:latin typeface="Calibri"/>
-              </a:rPr>
-              <a:t>•  Browser fetches lot images directly from Wikimedia Commons</a:t>
-            </a:r>
-          </a:p>
-        </p:txBody>
-      </p:sp>
-      <p:sp>
-        <p:nvSpPr>
-          <p:cNvPr id="9" name="TextBox 8"/>
+            <a:pPr algn="l">
+              <a:spcAft>
+                <a:spcPts val="400"/>
+              </a:spcAft>
+            </a:pPr>
+            <a:r>
+              <a:rPr sz="1050" b="0" i="0">
+                <a:solidFill>
+                  <a:srgbClr val="5B677D"/>
+                </a:solidFill>
+                <a:latin typeface="Arial"/>
+              </a:rPr>
+              <a:t>Shipped the plan and then some: 250 seeded lots across 8 auctions, a 5 s poller that closes auctions on time, Caddy TLS in front, and session cookies that re-ask for the code.</a:t>
+            </a:r>
+          </a:p>
+        </p:txBody>
+      </p:sp>
+      <p:sp>
+        <p:nvSpPr>
+          <p:cNvPr id="12" name="TextBox 11"/>
           <p:cNvSpPr txBox="1"/>
           <p:nvPr/>
         </p:nvSpPr>
         <p:spPr>
           <a:xfrm>
-            <a:off x="457200" y="6446520"/>
-            <a:ext cx="11277295" cy="274320"/>
+            <a:off x="457200" y="4759452"/>
+            <a:ext cx="5486400" cy="182880"/>
           </a:xfrm>
           <a:prstGeom prst="rect">
             <a:avLst/>
@@ -3883,24 +4018,63 @@
           <a:noFill/>
         </p:spPr>
         <p:txBody>
-          <a:bodyPr wrap="square" anchor="t" lIns="45720" rIns="45720" tIns="27432" bIns="27432">
+          <a:bodyPr wrap="square" anchor="t" lIns="0" rIns="0" tIns="0" bIns="0">
             <a:spAutoFit/>
           </a:bodyPr>
           <a:lstStyle/>
           <a:p>
-            <a:pPr>
-              <a:spcAft>
-                <a:spcPts val="600"/>
-              </a:spcAft>
-            </a:pPr>
-            <a:r>
-              <a:rPr sz="900" b="0">
-                <a:solidFill>
-                  <a:srgbClr val="5F6368"/>
-                </a:solidFill>
-                <a:latin typeface="Calibri"/>
-              </a:rPr>
-              <a:t>COG-GTM/realdreamteam  ·  docs/generate_overview_deck.py  ·  2/3</a:t>
+            <a:pPr algn="l">
+              <a:spcAft>
+                <a:spcPts val="400"/>
+              </a:spcAft>
+            </a:pPr>
+            <a:r>
+              <a:rPr sz="750" b="0" i="0">
+                <a:solidFill>
+                  <a:srgbClr val="5B677D"/>
+                </a:solidFill>
+                <a:latin typeface="Courier New"/>
+              </a:rPr>
+              <a:t>Plan</a:t>
+            </a:r>
+          </a:p>
+        </p:txBody>
+      </p:sp>
+      <p:sp>
+        <p:nvSpPr>
+          <p:cNvPr id="13" name="TextBox 12"/>
+          <p:cNvSpPr txBox="1"/>
+          <p:nvPr/>
+        </p:nvSpPr>
+        <p:spPr>
+          <a:xfrm>
+            <a:off x="7315200" y="4759452"/>
+            <a:ext cx="1371600" cy="182880"/>
+          </a:xfrm>
+          <a:prstGeom prst="rect">
+            <a:avLst/>
+          </a:prstGeom>
+          <a:noFill/>
+        </p:spPr>
+        <p:txBody>
+          <a:bodyPr wrap="square" anchor="t" lIns="0" rIns="0" tIns="0" bIns="0">
+            <a:spAutoFit/>
+          </a:bodyPr>
+          <a:lstStyle/>
+          <a:p>
+            <a:pPr algn="r">
+              <a:spcAft>
+                <a:spcPts val="400"/>
+              </a:spcAft>
+            </a:pPr>
+            <a:r>
+              <a:rPr sz="750" b="0" i="0">
+                <a:solidFill>
+                  <a:srgbClr val="5B677D"/>
+                </a:solidFill>
+                <a:latin typeface="Courier New"/>
+              </a:rPr>
+              <a:t>2 / 6</a:t>
             </a:r>
           </a:p>
         </p:txBody>
@@ -3925,44 +4099,574 @@
       <p:grpSpPr/>
       <p:sp>
         <p:nvSpPr>
-          <p:cNvPr id="2" name="Rectangle 1"/>
-          <p:cNvSpPr/>
-          <p:nvPr/>
-        </p:nvSpPr>
-        <p:spPr>
-          <a:xfrm>
-            <a:off x="0" y="0"/>
-            <a:ext cx="12191695" cy="1051560"/>
+          <p:cNvPr id="2" name="TextBox 1"/>
+          <p:cNvSpPr txBox="1"/>
+          <p:nvPr/>
+        </p:nvSpPr>
+        <p:spPr>
+          <a:xfrm>
+            <a:off x="457200" y="292608"/>
+            <a:ext cx="8229600" cy="228600"/>
           </a:xfrm>
           <a:prstGeom prst="rect">
             <a:avLst/>
           </a:prstGeom>
+          <a:noFill/>
+        </p:spPr>
+        <p:txBody>
+          <a:bodyPr wrap="square" anchor="t" lIns="0" rIns="0" tIns="0" bIns="0">
+            <a:spAutoFit/>
+          </a:bodyPr>
+          <a:lstStyle/>
+          <a:p>
+            <a:pPr algn="l">
+              <a:spcAft>
+                <a:spcPts val="400"/>
+              </a:spcAft>
+            </a:pPr>
+            <a:r>
+              <a:rPr sz="800" b="0" i="0">
+                <a:solidFill>
+                  <a:srgbClr val="4F5F8F"/>
+                </a:solidFill>
+                <a:latin typeface="Courier New"/>
+              </a:rPr>
+              <a:t>THE PRODUCT · LIVE AT RDT-AUCTION.MARKLOVESTECH.COM</a:t>
+            </a:r>
+          </a:p>
+        </p:txBody>
+      </p:sp>
+      <p:sp>
+        <p:nvSpPr>
+          <p:cNvPr id="3" name="TextBox 2"/>
+          <p:cNvSpPr txBox="1"/>
+          <p:nvPr/>
+        </p:nvSpPr>
+        <p:spPr>
+          <a:xfrm>
+            <a:off x="457200" y="502920"/>
+            <a:ext cx="8229600" cy="411480"/>
+          </a:xfrm>
+          <a:prstGeom prst="rect">
+            <a:avLst/>
+          </a:prstGeom>
+          <a:noFill/>
+        </p:spPr>
+        <p:txBody>
+          <a:bodyPr wrap="square" anchor="t" lIns="0" rIns="0" tIns="0" bIns="0">
+            <a:spAutoFit/>
+          </a:bodyPr>
+          <a:lstStyle/>
+          <a:p>
+            <a:pPr algn="l">
+              <a:spcAft>
+                <a:spcPts val="400"/>
+              </a:spcAft>
+            </a:pPr>
+            <a:r>
+              <a:rPr sz="2200" b="1" i="0">
+                <a:solidFill>
+                  <a:srgbClr val="111827"/>
+                </a:solidFill>
+                <a:latin typeface="Arial"/>
+              </a:rPr>
+              <a:t>The auction app, today</a:t>
+            </a:r>
+          </a:p>
+        </p:txBody>
+      </p:sp>
+      <p:sp>
+        <p:nvSpPr>
+          <p:cNvPr id="4" name="TextBox 3"/>
+          <p:cNvSpPr txBox="1"/>
+          <p:nvPr/>
+        </p:nvSpPr>
+        <p:spPr>
+          <a:xfrm>
+            <a:off x="457200" y="1051560"/>
+            <a:ext cx="3749039" cy="3017520"/>
+          </a:xfrm>
+          <a:prstGeom prst="rect">
+            <a:avLst/>
+          </a:prstGeom>
+          <a:noFill/>
+        </p:spPr>
+        <p:txBody>
+          <a:bodyPr wrap="square" anchor="t" lIns="0" rIns="0" tIns="0" bIns="0">
+            <a:spAutoFit/>
+          </a:bodyPr>
+          <a:lstStyle/>
+          <a:p>
+            <a:pPr algn="l">
+              <a:spcAft>
+                <a:spcPts val="400"/>
+              </a:spcAft>
+            </a:pPr>
+            <a:r>
+              <a:rPr sz="1050" b="1" i="0">
+                <a:solidFill>
+                  <a:srgbClr val="111827"/>
+                </a:solidFill>
+                <a:latin typeface="Arial"/>
+              </a:rPr>
+              <a:t>Sign in</a:t>
+            </a:r>
+            <a:r>
+              <a:rPr sz="1050" b="0" i="0">
+                <a:solidFill>
+                  <a:srgbClr val="111827"/>
+                </a:solidFill>
+                <a:latin typeface="Arial"/>
+              </a:rPr>
+              <a:t> with the site code, then pick your name.</a:t>
+            </a:r>
+          </a:p>
+          <a:p>
+            <a:pPr algn="l">
+              <a:spcAft>
+                <a:spcPts val="400"/>
+              </a:spcAft>
+            </a:pPr>
+            <a:r>
+              <a:rPr sz="1050" b="1" i="0">
+                <a:solidFill>
+                  <a:srgbClr val="111827"/>
+                </a:solidFill>
+                <a:latin typeface="Arial"/>
+              </a:rPr>
+              <a:t>Summary</a:t>
+            </a:r>
+            <a:r>
+              <a:rPr sz="1050" b="0" i="0">
+                <a:solidFill>
+                  <a:srgbClr val="111827"/>
+                </a:solidFill>
+                <a:latin typeface="Arial"/>
+              </a:rPr>
+              <a:t> shows Notifications, “Matches your interests”, and Discover — 5 random open lots, fresh on every refresh.</a:t>
+            </a:r>
+          </a:p>
+          <a:p>
+            <a:pPr algn="l">
+              <a:spcAft>
+                <a:spcPts val="400"/>
+              </a:spcAft>
+            </a:pPr>
+            <a:r>
+              <a:rPr sz="1050" b="1" i="0">
+                <a:solidFill>
+                  <a:srgbClr val="111827"/>
+                </a:solidFill>
+                <a:latin typeface="Arial"/>
+              </a:rPr>
+              <a:t>Browse</a:t>
+            </a:r>
+            <a:r>
+              <a:rPr sz="1050" b="0" i="0">
+                <a:solidFill>
+                  <a:srgbClr val="111827"/>
+                </a:solidFill>
+                <a:latin typeface="Arial"/>
+              </a:rPr>
+              <a:t> auctions and lots, ★ favorite, and place whole-number bids that must beat the current high bid.</a:t>
+            </a:r>
+          </a:p>
+          <a:p>
+            <a:pPr algn="l">
+              <a:spcAft>
+                <a:spcPts val="400"/>
+              </a:spcAft>
+            </a:pPr>
+            <a:r>
+              <a:rPr sz="1050" b="1" i="0">
+                <a:solidFill>
+                  <a:srgbClr val="111827"/>
+                </a:solidFill>
+                <a:latin typeface="Arial"/>
+              </a:rPr>
+              <a:t>Matching</a:t>
+            </a:r>
+            <a:r>
+              <a:rPr sz="1050" b="0" i="0">
+                <a:solidFill>
+                  <a:srgbClr val="111827"/>
+                </a:solidFill>
+                <a:latin typeface="Arial"/>
+              </a:rPr>
+              <a:t> by category, artist or keyword, with “why it matched” chips on every card.</a:t>
+            </a:r>
+          </a:p>
+          <a:p>
+            <a:pPr algn="l">
+              <a:spcAft>
+                <a:spcPts val="400"/>
+              </a:spcAft>
+            </a:pPr>
+            <a:r>
+              <a:rPr sz="1050" b="1" i="0">
+                <a:solidFill>
+                  <a:srgbClr val="111827"/>
+                </a:solidFill>
+                <a:latin typeface="Arial"/>
+              </a:rPr>
+              <a:t>Auction close</a:t>
+            </a:r>
+            <a:r>
+              <a:rPr sz="1050" b="0" i="0">
+                <a:solidFill>
+                  <a:srgbClr val="111827"/>
+                </a:solidFill>
+                <a:latin typeface="Arial"/>
+              </a:rPr>
+              <a:t> → SOLD ribbon, hammer price, winner, a sound, and Won/Lost notifications for every bidder.</a:t>
+            </a:r>
+          </a:p>
+          <a:p>
+            <a:pPr algn="l">
+              <a:spcAft>
+                <a:spcPts val="400"/>
+              </a:spcAft>
+            </a:pPr>
+            <a:r>
+              <a:rPr sz="1050" b="1" i="0">
+                <a:solidFill>
+                  <a:srgbClr val="111827"/>
+                </a:solidFill>
+                <a:latin typeface="Arial"/>
+              </a:rPr>
+              <a:t>/admin</a:t>
+            </a:r>
+            <a:r>
+              <a:rPr sz="1050" b="0" i="0">
+                <a:solidFill>
+                  <a:srgbClr val="111827"/>
+                </a:solidFill>
+                <a:latin typeface="Arial"/>
+              </a:rPr>
+              <a:t> (second code): add lots, edit close times, close/reopen auctions, ban users.</a:t>
+            </a:r>
+          </a:p>
+        </p:txBody>
+      </p:sp>
+      <p:sp>
+        <p:nvSpPr>
+          <p:cNvPr id="5" name="TextBox 4"/>
+          <p:cNvSpPr txBox="1"/>
+          <p:nvPr/>
+        </p:nvSpPr>
+        <p:spPr>
+          <a:xfrm>
+            <a:off x="457200" y="3611880"/>
+            <a:ext cx="3749039" cy="457200"/>
+          </a:xfrm>
+          <a:prstGeom prst="rect">
+            <a:avLst/>
+          </a:prstGeom>
+          <a:noFill/>
+        </p:spPr>
+        <p:txBody>
+          <a:bodyPr wrap="square" anchor="t" lIns="0" rIns="0" tIns="0" bIns="0">
+            <a:spAutoFit/>
+          </a:bodyPr>
+          <a:lstStyle/>
+          <a:p>
+            <a:pPr algn="l">
+              <a:spcAft>
+                <a:spcPts val="400"/>
+              </a:spcAft>
+            </a:pPr>
+            <a:r>
+              <a:rPr sz="950" b="0" i="0">
+                <a:solidFill>
+                  <a:srgbClr val="5B677D"/>
+                </a:solidFill>
+                <a:latin typeface="Arial"/>
+              </a:rPr>
+              <a:t>Lot images are hotlinked from Wikimedia Commons; all state lives in Postgres.</a:t>
+            </a:r>
+          </a:p>
+        </p:txBody>
+      </p:sp>
+      <p:sp>
+        <p:nvSpPr>
+          <p:cNvPr id="6" name="Rounded Rectangle 5"/>
+          <p:cNvSpPr/>
+          <p:nvPr/>
+        </p:nvSpPr>
+        <p:spPr>
+          <a:xfrm>
+            <a:off x="457200" y="4023360"/>
+            <a:ext cx="1554480" cy="329184"/>
+          </a:xfrm>
+          <a:prstGeom prst="roundRect">
+            <a:avLst>
+              <a:gd name="adj" fmla="val 30000"/>
+            </a:avLst>
+          </a:prstGeom>
           <a:solidFill>
-            <a:srgbClr val="1F2A44"/>
+            <a:srgbClr val="1E3A8A"/>
           </a:solidFill>
           <a:ln>
             <a:noFill/>
           </a:ln>
-        </p:spPr>
-        <p:style>
-          <a:lnRef idx="1">
-            <a:schemeClr val="accent1"/>
-          </a:lnRef>
-          <a:fillRef idx="3">
-            <a:schemeClr val="accent1"/>
-          </a:fillRef>
-          <a:effectRef idx="2">
-            <a:schemeClr val="accent1"/>
-          </a:effectRef>
-          <a:fontRef idx="minor">
-            <a:schemeClr val="lt1"/>
-          </a:fontRef>
-        </p:style>
+          <a:effectLst/>
+        </p:spPr>
         <p:txBody>
           <a:bodyPr rtlCol="0" anchor="ctr"/>
           <a:lstStyle/>
           <a:p>
             <a:pPr algn="ctr"/>
+            <a:r>
+              <a:rPr sz="1000" b="1">
+                <a:solidFill>
+                  <a:srgbClr val="FFFFFF"/>
+                </a:solidFill>
+                <a:latin typeface="Arial"/>
+              </a:rPr>
+              <a:t>Open the app →</a:t>
+            </a:r>
+          </a:p>
+        </p:txBody>
+      </p:sp>
+      <p:sp>
+        <p:nvSpPr>
+          <p:cNvPr id="7" name="TextBox 6"/>
+          <p:cNvSpPr txBox="1"/>
+          <p:nvPr/>
+        </p:nvSpPr>
+        <p:spPr>
+          <a:xfrm>
+            <a:off x="2148840" y="4087368"/>
+            <a:ext cx="2103120" cy="228600"/>
+          </a:xfrm>
+          <a:prstGeom prst="rect">
+            <a:avLst/>
+          </a:prstGeom>
+          <a:noFill/>
+        </p:spPr>
+        <p:txBody>
+          <a:bodyPr wrap="square" anchor="t" lIns="0" rIns="0" tIns="0" bIns="0">
+            <a:spAutoFit/>
+          </a:bodyPr>
+          <a:lstStyle/>
+          <a:p>
+            <a:pPr algn="l">
+              <a:spcAft>
+                <a:spcPts val="400"/>
+              </a:spcAft>
+            </a:pPr>
+            <a:r>
+              <a:rPr sz="800" b="0" i="0">
+                <a:solidFill>
+                  <a:srgbClr val="5B677D"/>
+                </a:solidFill>
+                <a:latin typeface="Courier New"/>
+              </a:rPr>
+              <a:t>auction-app/ · npm start</a:t>
+            </a:r>
+          </a:p>
+        </p:txBody>
+      </p:sp>
+      <p:pic>
+        <p:nvPicPr>
+          <p:cNvPr id="8" name="Picture 7" descr="mockup-summary.png"/>
+          <p:cNvPicPr>
+            <a:picLocks noChangeAspect="1"/>
+          </p:cNvPicPr>
+          <p:nvPr/>
+        </p:nvPicPr>
+        <p:blipFill>
+          <a:blip r:embed="rId2"/>
+          <a:stretch>
+            <a:fillRect/>
+          </a:stretch>
+        </p:blipFill>
+        <p:spPr>
+          <a:xfrm>
+            <a:off x="4981651" y="1051560"/>
+            <a:ext cx="3204057" cy="3337559"/>
+          </a:xfrm>
+          <a:prstGeom prst="rect">
+            <a:avLst/>
+          </a:prstGeom>
+          <a:ln w="9525">
+            <a:solidFill>
+              <a:srgbClr val="E3E7EE"/>
+            </a:solidFill>
+          </a:ln>
+        </p:spPr>
+      </p:pic>
+      <p:sp>
+        <p:nvSpPr>
+          <p:cNvPr id="9" name="TextBox 8"/>
+          <p:cNvSpPr txBox="1"/>
+          <p:nvPr/>
+        </p:nvSpPr>
+        <p:spPr>
+          <a:xfrm>
+            <a:off x="4480559" y="4434840"/>
+            <a:ext cx="4206241" cy="182880"/>
+          </a:xfrm>
+          <a:prstGeom prst="rect">
+            <a:avLst/>
+          </a:prstGeom>
+          <a:noFill/>
+        </p:spPr>
+        <p:txBody>
+          <a:bodyPr wrap="square" anchor="t" lIns="0" rIns="0" tIns="0" bIns="0">
+            <a:spAutoFit/>
+          </a:bodyPr>
+          <a:lstStyle/>
+          <a:p>
+            <a:pPr algn="r">
+              <a:spcAft>
+                <a:spcPts val="400"/>
+              </a:spcAft>
+            </a:pPr>
+            <a:r>
+              <a:rPr sz="750" b="0" i="0">
+                <a:solidFill>
+                  <a:srgbClr val="5B677D"/>
+                </a:solidFill>
+                <a:latin typeface="Courier New"/>
+              </a:rPr>
+              <a:t>docs/mockup-summary.html</a:t>
+            </a:r>
+          </a:p>
+        </p:txBody>
+      </p:sp>
+      <p:sp>
+        <p:nvSpPr>
+          <p:cNvPr id="10" name="TextBox 9"/>
+          <p:cNvSpPr txBox="1"/>
+          <p:nvPr/>
+        </p:nvSpPr>
+        <p:spPr>
+          <a:xfrm>
+            <a:off x="457200" y="4759452"/>
+            <a:ext cx="5486400" cy="182880"/>
+          </a:xfrm>
+          <a:prstGeom prst="rect">
+            <a:avLst/>
+          </a:prstGeom>
+          <a:noFill/>
+        </p:spPr>
+        <p:txBody>
+          <a:bodyPr wrap="square" anchor="t" lIns="0" rIns="0" tIns="0" bIns="0">
+            <a:spAutoFit/>
+          </a:bodyPr>
+          <a:lstStyle/>
+          <a:p>
+            <a:pPr algn="l">
+              <a:spcAft>
+                <a:spcPts val="400"/>
+              </a:spcAft>
+            </a:pPr>
+            <a:r>
+              <a:rPr sz="750" b="0" i="0">
+                <a:solidFill>
+                  <a:srgbClr val="5B677D"/>
+                </a:solidFill>
+                <a:latin typeface="Courier New"/>
+              </a:rPr>
+              <a:t>Demo · github.com/COG-GTM/realdreamteam</a:t>
+            </a:r>
+          </a:p>
+        </p:txBody>
+      </p:sp>
+      <p:sp>
+        <p:nvSpPr>
+          <p:cNvPr id="11" name="TextBox 10"/>
+          <p:cNvSpPr txBox="1"/>
+          <p:nvPr/>
+        </p:nvSpPr>
+        <p:spPr>
+          <a:xfrm>
+            <a:off x="7315200" y="4759452"/>
+            <a:ext cx="1371600" cy="182880"/>
+          </a:xfrm>
+          <a:prstGeom prst="rect">
+            <a:avLst/>
+          </a:prstGeom>
+          <a:noFill/>
+        </p:spPr>
+        <p:txBody>
+          <a:bodyPr wrap="square" anchor="t" lIns="0" rIns="0" tIns="0" bIns="0">
+            <a:spAutoFit/>
+          </a:bodyPr>
+          <a:lstStyle/>
+          <a:p>
+            <a:pPr algn="r">
+              <a:spcAft>
+                <a:spcPts val="400"/>
+              </a:spcAft>
+            </a:pPr>
+            <a:r>
+              <a:rPr sz="750" b="0" i="0">
+                <a:solidFill>
+                  <a:srgbClr val="5B677D"/>
+                </a:solidFill>
+                <a:latin typeface="Courier New"/>
+              </a:rPr>
+              <a:t>3 / 6</a:t>
+            </a:r>
+          </a:p>
+        </p:txBody>
+      </p:sp>
+    </p:spTree>
+  </p:cSld>
+  <p:clrMapOvr>
+    <a:masterClrMapping/>
+  </p:clrMapOvr>
+</p:sld>
+</file>
+
+<file path=ppt/slides/slide4.xml><?xml version="1.0" encoding="utf-8"?>
+<p:sld xmlns:a="http://schemas.openxmlformats.org/drawingml/2006/main" xmlns:p="http://schemas.openxmlformats.org/presentationml/2006/main" xmlns:r="http://schemas.openxmlformats.org/officeDocument/2006/relationships">
+  <p:cSld>
+    <p:spTree>
+      <p:nvGrpSpPr>
+        <p:cNvPr id="1" name=""/>
+        <p:cNvGrpSpPr/>
+        <p:nvPr/>
+      </p:nvGrpSpPr>
+      <p:grpSpPr/>
+      <p:sp>
+        <p:nvSpPr>
+          <p:cNvPr id="2" name="TextBox 1"/>
+          <p:cNvSpPr txBox="1"/>
+          <p:nvPr/>
+        </p:nvSpPr>
+        <p:spPr>
+          <a:xfrm>
+            <a:off x="457200" y="292608"/>
+            <a:ext cx="8229600" cy="228600"/>
+          </a:xfrm>
+          <a:prstGeom prst="rect">
+            <a:avLst/>
+          </a:prstGeom>
+          <a:noFill/>
+        </p:spPr>
+        <p:txBody>
+          <a:bodyPr wrap="square" anchor="t" lIns="0" rIns="0" tIns="0" bIns="0">
+            <a:spAutoFit/>
+          </a:bodyPr>
+          <a:lstStyle/>
+          <a:p>
+            <a:pPr algn="l">
+              <a:spcAft>
+                <a:spcPts val="400"/>
+              </a:spcAft>
+            </a:pPr>
+            <a:r>
+              <a:rPr sz="800" b="0" i="0">
+                <a:solidFill>
+                  <a:srgbClr val="4F5F8F"/>
+                </a:solidFill>
+                <a:latin typeface="Courier New"/>
+              </a:rPr>
+              <a:t>HOW IT RUNS · THREE MOVING PARTS, ALL ALWAYS ON</a:t>
+            </a:r>
           </a:p>
         </p:txBody>
       </p:sp>
@@ -3974,8 +4678,8 @@
         </p:nvSpPr>
         <p:spPr>
           <a:xfrm>
-            <a:off x="457200" y="109728"/>
-            <a:ext cx="11277295" cy="320040"/>
+            <a:off x="457200" y="502920"/>
+            <a:ext cx="8229600" cy="411480"/>
           </a:xfrm>
           <a:prstGeom prst="rect">
             <a:avLst/>
@@ -3983,64 +4687,575 @@
           <a:noFill/>
         </p:spPr>
         <p:txBody>
-          <a:bodyPr wrap="square" anchor="t" lIns="45720" rIns="45720" tIns="27432" bIns="27432">
+          <a:bodyPr wrap="square" anchor="t" lIns="0" rIns="0" tIns="0" bIns="0">
             <a:spAutoFit/>
           </a:bodyPr>
           <a:lstStyle/>
           <a:p>
-            <a:pPr>
-              <a:spcAft>
-                <a:spcPts val="600"/>
-              </a:spcAft>
-            </a:pPr>
-            <a:r>
-              <a:rPr sz="1200" b="0">
-                <a:solidFill>
-                  <a:srgbClr val="C9D3E6"/>
-                </a:solidFill>
-                <a:latin typeface="Calibri"/>
-              </a:rPr>
-              <a:t>3 · How it was built</a:t>
-            </a:r>
-          </a:p>
-        </p:txBody>
-      </p:sp>
-      <p:sp>
-        <p:nvSpPr>
-          <p:cNvPr id="4" name="TextBox 3"/>
-          <p:cNvSpPr txBox="1"/>
-          <p:nvPr/>
-        </p:nvSpPr>
-        <p:spPr>
-          <a:xfrm>
-            <a:off x="457200" y="384048"/>
-            <a:ext cx="11277295" cy="594360"/>
+            <a:pPr algn="l">
+              <a:spcAft>
+                <a:spcPts val="400"/>
+              </a:spcAft>
+            </a:pPr>
+            <a:r>
+              <a:rPr sz="2200" b="1" i="0">
+                <a:solidFill>
+                  <a:srgbClr val="111827"/>
+                </a:solidFill>
+                <a:latin typeface="Arial"/>
+              </a:rPr>
+              <a:t>Architecture</a:t>
+            </a:r>
+          </a:p>
+        </p:txBody>
+      </p:sp>
+      <p:pic>
+        <p:nvPicPr>
+          <p:cNvPr id="4" name="Picture 3" descr="architecture.png"/>
+          <p:cNvPicPr>
+            <a:picLocks noChangeAspect="1"/>
+          </p:cNvPicPr>
+          <p:nvPr/>
+        </p:nvPicPr>
+        <p:blipFill>
+          <a:blip r:embed="rId2"/>
+          <a:stretch>
+            <a:fillRect/>
+          </a:stretch>
+        </p:blipFill>
+        <p:spPr>
+          <a:xfrm>
+            <a:off x="457200" y="1005840"/>
+            <a:ext cx="8229599" cy="1659001"/>
           </a:xfrm>
           <a:prstGeom prst="rect">
             <a:avLst/>
           </a:prstGeom>
+          <a:ln w="9525">
+            <a:solidFill>
+              <a:srgbClr val="E3E7EE"/>
+            </a:solidFill>
+          </a:ln>
+        </p:spPr>
+      </p:pic>
+      <p:sp>
+        <p:nvSpPr>
+          <p:cNvPr id="5" name="TextBox 4"/>
+          <p:cNvSpPr txBox="1"/>
+          <p:nvPr/>
+        </p:nvSpPr>
+        <p:spPr>
+          <a:xfrm>
+            <a:off x="457200" y="2715768"/>
+            <a:ext cx="8229600" cy="182880"/>
+          </a:xfrm>
+          <a:prstGeom prst="rect">
+            <a:avLst/>
+          </a:prstGeom>
           <a:noFill/>
         </p:spPr>
         <p:txBody>
-          <a:bodyPr wrap="square" anchor="t" lIns="45720" rIns="45720" tIns="27432" bIns="27432">
+          <a:bodyPr wrap="square" anchor="t" lIns="0" rIns="0" tIns="0" bIns="0">
             <a:spAutoFit/>
           </a:bodyPr>
           <a:lstStyle/>
           <a:p>
-            <a:pPr>
-              <a:spcAft>
-                <a:spcPts val="600"/>
-              </a:spcAft>
-            </a:pPr>
-            <a:r>
-              <a:rPr sz="2800" b="1">
-                <a:solidFill>
-                  <a:srgbClr val="FFFFFF"/>
-                </a:solidFill>
-                <a:latin typeface="Calibri"/>
-              </a:rPr>
-              <a:t>Collaborative build: GitHub + Devin sessions</a:t>
-            </a:r>
+            <a:pPr algn="l">
+              <a:spcAft>
+                <a:spcPts val="400"/>
+              </a:spcAft>
+            </a:pPr>
+            <a:r>
+              <a:rPr sz="750" b="0" i="0">
+                <a:solidFill>
+                  <a:srgbClr val="5B677D"/>
+                </a:solidFill>
+                <a:latin typeface="Courier New"/>
+              </a:rPr>
+              <a:t>docs/architecture.mmd · rendered with mermaid-cli</a:t>
+            </a:r>
+          </a:p>
+        </p:txBody>
+      </p:sp>
+      <p:sp>
+        <p:nvSpPr>
+          <p:cNvPr id="6" name="Rounded Rectangle 5"/>
+          <p:cNvSpPr/>
+          <p:nvPr/>
+        </p:nvSpPr>
+        <p:spPr>
+          <a:xfrm>
+            <a:off x="457200" y="2971800"/>
+            <a:ext cx="4046220" cy="1600200"/>
+          </a:xfrm>
+          <a:prstGeom prst="roundRect">
+            <a:avLst>
+              <a:gd name="adj" fmla="val 4000"/>
+            </a:avLst>
+          </a:prstGeom>
+          <a:solidFill>
+            <a:srgbClr val="FAFBFC"/>
+          </a:solidFill>
+          <a:ln w="9525">
+            <a:solidFill>
+              <a:srgbClr val="E3E7EE"/>
+            </a:solidFill>
+          </a:ln>
+          <a:effectLst/>
+        </p:spPr>
+        <p:txBody>
+          <a:bodyPr rtlCol="0" anchor="ctr"/>
+          <a:lstStyle/>
+          <a:p>
+            <a:pPr algn="ctr"/>
+          </a:p>
+        </p:txBody>
+      </p:sp>
+      <p:sp>
+        <p:nvSpPr>
+          <p:cNvPr id="7" name="TextBox 6"/>
+          <p:cNvSpPr txBox="1"/>
+          <p:nvPr/>
+        </p:nvSpPr>
+        <p:spPr>
+          <a:xfrm>
+            <a:off x="594360" y="3108960"/>
+            <a:ext cx="3771900" cy="1325880"/>
+          </a:xfrm>
+          <a:prstGeom prst="rect">
+            <a:avLst/>
+          </a:prstGeom>
+          <a:noFill/>
+        </p:spPr>
+        <p:txBody>
+          <a:bodyPr wrap="square" anchor="t" lIns="0" rIns="0" tIns="0" bIns="0">
+            <a:spAutoFit/>
+          </a:bodyPr>
+          <a:lstStyle/>
+          <a:p>
+            <a:pPr algn="l">
+              <a:spcAft>
+                <a:spcPts val="500"/>
+              </a:spcAft>
+            </a:pPr>
+            <a:r>
+              <a:rPr sz="1100" b="1" i="0">
+                <a:solidFill>
+                  <a:srgbClr val="111827"/>
+                </a:solidFill>
+                <a:latin typeface="Arial"/>
+              </a:rPr>
+              <a:t>Stack</a:t>
+            </a:r>
+          </a:p>
+          <a:p>
+            <a:pPr algn="l">
+              <a:spcAft>
+                <a:spcPts val="400"/>
+              </a:spcAft>
+            </a:pPr>
+            <a:r>
+              <a:rPr sz="900" b="0" i="0">
+                <a:solidFill>
+                  <a:srgbClr val="111827"/>
+                </a:solidFill>
+                <a:latin typeface="Arial"/>
+              </a:rPr>
+              <a:t>•  Node.js 20 + Express + EJS + hand-written SQL (pg)</a:t>
+            </a:r>
+          </a:p>
+          <a:p>
+            <a:pPr algn="l">
+              <a:spcAft>
+                <a:spcPts val="400"/>
+              </a:spcAft>
+            </a:pPr>
+            <a:r>
+              <a:rPr sz="900" b="0" i="0">
+                <a:solidFill>
+                  <a:srgbClr val="111827"/>
+                </a:solidFill>
+                <a:latin typeface="Arial"/>
+              </a:rPr>
+              <a:t>•  No build step, no frontend framework, no API layer — the server renders HTML</a:t>
+            </a:r>
+          </a:p>
+          <a:p>
+            <a:pPr algn="l">
+              <a:spcAft>
+                <a:spcPts val="400"/>
+              </a:spcAft>
+            </a:pPr>
+            <a:r>
+              <a:rPr sz="900" b="0" i="0">
+                <a:solidFill>
+                  <a:srgbClr val="111827"/>
+                </a:solidFill>
+                <a:latin typeface="Arial"/>
+              </a:rPr>
+              <a:t>•  Stateless Node process under systemd, with a 5 s poller that closes auctions on time</a:t>
+            </a:r>
+          </a:p>
+          <a:p>
+            <a:pPr algn="l">
+              <a:spcAft>
+                <a:spcPts val="400"/>
+              </a:spcAft>
+            </a:pPr>
+            <a:r>
+              <a:rPr sz="900" b="0" i="0">
+                <a:solidFill>
+                  <a:srgbClr val="111827"/>
+                </a:solidFill>
+                <a:latin typeface="Arial"/>
+              </a:rPr>
+              <a:t>•  State only in Postgres; npm run db:reset reloads data/seed/*.json</a:t>
+            </a:r>
+          </a:p>
+        </p:txBody>
+      </p:sp>
+      <p:sp>
+        <p:nvSpPr>
+          <p:cNvPr id="8" name="Rounded Rectangle 7"/>
+          <p:cNvSpPr/>
+          <p:nvPr/>
+        </p:nvSpPr>
+        <p:spPr>
+          <a:xfrm>
+            <a:off x="4640580" y="2971800"/>
+            <a:ext cx="4046220" cy="1600200"/>
+          </a:xfrm>
+          <a:prstGeom prst="roundRect">
+            <a:avLst>
+              <a:gd name="adj" fmla="val 4000"/>
+            </a:avLst>
+          </a:prstGeom>
+          <a:solidFill>
+            <a:srgbClr val="FAFBFC"/>
+          </a:solidFill>
+          <a:ln w="9525">
+            <a:solidFill>
+              <a:srgbClr val="E3E7EE"/>
+            </a:solidFill>
+          </a:ln>
+          <a:effectLst/>
+        </p:spPr>
+        <p:txBody>
+          <a:bodyPr rtlCol="0" anchor="ctr"/>
+          <a:lstStyle/>
+          <a:p>
+            <a:pPr algn="ctr"/>
+          </a:p>
+        </p:txBody>
+      </p:sp>
+      <p:sp>
+        <p:nvSpPr>
+          <p:cNvPr id="9" name="TextBox 8"/>
+          <p:cNvSpPr txBox="1"/>
+          <p:nvPr/>
+        </p:nvSpPr>
+        <p:spPr>
+          <a:xfrm>
+            <a:off x="4777740" y="3108960"/>
+            <a:ext cx="3771900" cy="1325880"/>
+          </a:xfrm>
+          <a:prstGeom prst="rect">
+            <a:avLst/>
+          </a:prstGeom>
+          <a:noFill/>
+        </p:spPr>
+        <p:txBody>
+          <a:bodyPr wrap="square" anchor="t" lIns="0" rIns="0" tIns="0" bIns="0">
+            <a:spAutoFit/>
+          </a:bodyPr>
+          <a:lstStyle/>
+          <a:p>
+            <a:pPr algn="l">
+              <a:spcAft>
+                <a:spcPts val="500"/>
+              </a:spcAft>
+            </a:pPr>
+            <a:r>
+              <a:rPr sz="1100" b="1" i="0">
+                <a:solidFill>
+                  <a:srgbClr val="111827"/>
+                </a:solidFill>
+                <a:latin typeface="Arial"/>
+              </a:rPr>
+              <a:t>Request flow</a:t>
+            </a:r>
+          </a:p>
+          <a:p>
+            <a:pPr algn="l">
+              <a:spcAft>
+                <a:spcPts val="400"/>
+              </a:spcAft>
+            </a:pPr>
+            <a:r>
+              <a:rPr sz="900" b="0" i="0">
+                <a:solidFill>
+                  <a:srgbClr val="111827"/>
+                </a:solidFill>
+                <a:latin typeface="Arial"/>
+              </a:rPr>
+              <a:t>•  IONOS DNS → EC2 instance</a:t>
+            </a:r>
+          </a:p>
+          <a:p>
+            <a:pPr algn="l">
+              <a:spcAft>
+                <a:spcPts val="400"/>
+              </a:spcAft>
+            </a:pPr>
+            <a:r>
+              <a:rPr sz="900" b="0" i="0">
+                <a:solidFill>
+                  <a:srgbClr val="111827"/>
+                </a:solidFill>
+                <a:latin typeface="Arial"/>
+              </a:rPr>
+              <a:t>•  Caddy terminates TLS on 80/443 (Let’s Encrypt) → Node on :3000</a:t>
+            </a:r>
+          </a:p>
+          <a:p>
+            <a:pPr algn="l">
+              <a:spcAft>
+                <a:spcPts val="400"/>
+              </a:spcAft>
+            </a:pPr>
+            <a:r>
+              <a:rPr sz="900" b="0" i="0">
+                <a:solidFill>
+                  <a:srgbClr val="111827"/>
+                </a:solidFill>
+                <a:latin typeface="Arial"/>
+              </a:rPr>
+              <a:t>•  Node runs a few SQL queries against Supabase Postgres → plain HTML</a:t>
+            </a:r>
+          </a:p>
+          <a:p>
+            <a:pPr algn="l">
+              <a:spcAft>
+                <a:spcPts val="400"/>
+              </a:spcAft>
+            </a:pPr>
+            <a:r>
+              <a:rPr sz="900" b="0" i="0">
+                <a:solidFill>
+                  <a:srgbClr val="111827"/>
+                </a:solidFill>
+                <a:latin typeface="Arial"/>
+              </a:rPr>
+              <a:t>•  Browser fetches lot images straight from Wikimedia Commons</a:t>
+            </a:r>
+          </a:p>
+        </p:txBody>
+      </p:sp>
+      <p:sp>
+        <p:nvSpPr>
+          <p:cNvPr id="10" name="TextBox 9"/>
+          <p:cNvSpPr txBox="1"/>
+          <p:nvPr/>
+        </p:nvSpPr>
+        <p:spPr>
+          <a:xfrm>
+            <a:off x="457200" y="4759452"/>
+            <a:ext cx="5486400" cy="182880"/>
+          </a:xfrm>
+          <a:prstGeom prst="rect">
+            <a:avLst/>
+          </a:prstGeom>
+          <a:noFill/>
+        </p:spPr>
+        <p:txBody>
+          <a:bodyPr wrap="square" anchor="t" lIns="0" rIns="0" tIns="0" bIns="0">
+            <a:spAutoFit/>
+          </a:bodyPr>
+          <a:lstStyle/>
+          <a:p>
+            <a:pPr algn="l">
+              <a:spcAft>
+                <a:spcPts val="400"/>
+              </a:spcAft>
+            </a:pPr>
+            <a:r>
+              <a:rPr sz="750" b="0" i="0">
+                <a:solidFill>
+                  <a:srgbClr val="5B677D"/>
+                </a:solidFill>
+                <a:latin typeface="Courier New"/>
+              </a:rPr>
+              <a:t>Architecture</a:t>
+            </a:r>
+          </a:p>
+        </p:txBody>
+      </p:sp>
+      <p:sp>
+        <p:nvSpPr>
+          <p:cNvPr id="11" name="TextBox 10"/>
+          <p:cNvSpPr txBox="1"/>
+          <p:nvPr/>
+        </p:nvSpPr>
+        <p:spPr>
+          <a:xfrm>
+            <a:off x="7315200" y="4759452"/>
+            <a:ext cx="1371600" cy="182880"/>
+          </a:xfrm>
+          <a:prstGeom prst="rect">
+            <a:avLst/>
+          </a:prstGeom>
+          <a:noFill/>
+        </p:spPr>
+        <p:txBody>
+          <a:bodyPr wrap="square" anchor="t" lIns="0" rIns="0" tIns="0" bIns="0">
+            <a:spAutoFit/>
+          </a:bodyPr>
+          <a:lstStyle/>
+          <a:p>
+            <a:pPr algn="r">
+              <a:spcAft>
+                <a:spcPts val="400"/>
+              </a:spcAft>
+            </a:pPr>
+            <a:r>
+              <a:rPr sz="750" b="0" i="0">
+                <a:solidFill>
+                  <a:srgbClr val="5B677D"/>
+                </a:solidFill>
+                <a:latin typeface="Courier New"/>
+              </a:rPr>
+              <a:t>4 / 6</a:t>
+            </a:r>
+          </a:p>
+        </p:txBody>
+      </p:sp>
+    </p:spTree>
+  </p:cSld>
+  <p:clrMapOvr>
+    <a:masterClrMapping/>
+  </p:clrMapOvr>
+</p:sld>
+</file>
+
+<file path=ppt/slides/slide5.xml><?xml version="1.0" encoding="utf-8"?>
+<p:sld xmlns:a="http://schemas.openxmlformats.org/drawingml/2006/main" xmlns:p="http://schemas.openxmlformats.org/presentationml/2006/main" xmlns:r="http://schemas.openxmlformats.org/officeDocument/2006/relationships">
+  <p:cSld>
+    <p:spTree>
+      <p:nvGrpSpPr>
+        <p:cNvPr id="1" name=""/>
+        <p:cNvGrpSpPr/>
+        <p:nvPr/>
+      </p:nvGrpSpPr>
+      <p:grpSpPr/>
+      <p:sp>
+        <p:nvSpPr>
+          <p:cNvPr id="2" name="TextBox 1"/>
+          <p:cNvSpPr txBox="1"/>
+          <p:nvPr/>
+        </p:nvSpPr>
+        <p:spPr>
+          <a:xfrm>
+            <a:off x="457200" y="292608"/>
+            <a:ext cx="8229600" cy="228600"/>
+          </a:xfrm>
+          <a:prstGeom prst="rect">
+            <a:avLst/>
+          </a:prstGeom>
+          <a:noFill/>
+        </p:spPr>
+        <p:txBody>
+          <a:bodyPr wrap="square" anchor="t" lIns="0" rIns="0" tIns="0" bIns="0">
+            <a:spAutoFit/>
+          </a:bodyPr>
+          <a:lstStyle/>
+          <a:p>
+            <a:pPr algn="l">
+              <a:spcAft>
+                <a:spcPts val="400"/>
+              </a:spcAft>
+            </a:pPr>
+            <a:r>
+              <a:rPr sz="800" b="0" i="0">
+                <a:solidFill>
+                  <a:srgbClr val="4F5F8F"/>
+                </a:solidFill>
+                <a:latin typeface="Courier New"/>
+              </a:rPr>
+              <a:t>HOW WE DELEGATED · ONE DEVIN SESSION PER CONCERN</a:t>
+            </a:r>
+          </a:p>
+        </p:txBody>
+      </p:sp>
+      <p:sp>
+        <p:nvSpPr>
+          <p:cNvPr id="3" name="TextBox 2"/>
+          <p:cNvSpPr txBox="1"/>
+          <p:nvPr/>
+        </p:nvSpPr>
+        <p:spPr>
+          <a:xfrm>
+            <a:off x="457200" y="502920"/>
+            <a:ext cx="8229600" cy="411480"/>
+          </a:xfrm>
+          <a:prstGeom prst="rect">
+            <a:avLst/>
+          </a:prstGeom>
+          <a:noFill/>
+        </p:spPr>
+        <p:txBody>
+          <a:bodyPr wrap="square" anchor="t" lIns="0" rIns="0" tIns="0" bIns="0">
+            <a:spAutoFit/>
+          </a:bodyPr>
+          <a:lstStyle/>
+          <a:p>
+            <a:pPr algn="l">
+              <a:spcAft>
+                <a:spcPts val="400"/>
+              </a:spcAft>
+            </a:pPr>
+            <a:r>
+              <a:rPr sz="2200" b="1" i="0">
+                <a:solidFill>
+                  <a:srgbClr val="111827"/>
+                </a:solidFill>
+                <a:latin typeface="Arial"/>
+              </a:rPr>
+              <a:t>One builder, eight Devin sessions, twenty PRs</a:t>
+            </a:r>
+          </a:p>
+        </p:txBody>
+      </p:sp>
+      <p:sp>
+        <p:nvSpPr>
+          <p:cNvPr id="4" name="Rounded Rectangle 3"/>
+          <p:cNvSpPr/>
+          <p:nvPr/>
+        </p:nvSpPr>
+        <p:spPr>
+          <a:xfrm>
+            <a:off x="457200" y="1005840"/>
+            <a:ext cx="1975104" cy="1325880"/>
+          </a:xfrm>
+          <a:prstGeom prst="roundRect">
+            <a:avLst>
+              <a:gd name="adj" fmla="val 4000"/>
+            </a:avLst>
+          </a:prstGeom>
+          <a:solidFill>
+            <a:srgbClr val="FAFBFC"/>
+          </a:solidFill>
+          <a:ln w="9525">
+            <a:solidFill>
+              <a:srgbClr val="E3E7EE"/>
+            </a:solidFill>
+          </a:ln>
+          <a:effectLst/>
+        </p:spPr>
+        <p:txBody>
+          <a:bodyPr rtlCol="0" anchor="ctr"/>
+          <a:lstStyle/>
+          <a:p>
+            <a:pPr algn="ctr"/>
           </a:p>
         </p:txBody>
       </p:sp>
@@ -4052,8 +5267,8 @@
         </p:nvSpPr>
         <p:spPr>
           <a:xfrm>
-            <a:off x="457200" y="1280160"/>
-            <a:ext cx="5455767" cy="4846320"/>
+            <a:off x="566928" y="1115568"/>
+            <a:ext cx="1755648" cy="1106424"/>
           </a:xfrm>
           <a:prstGeom prst="rect">
             <a:avLst/>
@@ -4061,182 +5276,252 @@
           <a:noFill/>
         </p:spPr>
         <p:txBody>
-          <a:bodyPr wrap="square" anchor="t" lIns="45720" rIns="45720" tIns="27432" bIns="27432">
+          <a:bodyPr wrap="square" anchor="t" lIns="0" rIns="0" tIns="0" bIns="0">
             <a:spAutoFit/>
           </a:bodyPr>
           <a:lstStyle/>
           <a:p>
-            <a:pPr>
-              <a:spcAft>
-                <a:spcPts val="800"/>
-              </a:spcAft>
-            </a:pPr>
-            <a:r>
-              <a:rPr sz="1500" b="1">
-                <a:solidFill>
-                  <a:srgbClr val="B45F06"/>
-                </a:solidFill>
-                <a:latin typeface="Calibri"/>
-              </a:rPr>
-              <a:t>One Devin session per concern</a:t>
-            </a:r>
-          </a:p>
-          <a:p>
-            <a:pPr>
-              <a:spcAft>
-                <a:spcPts val="800"/>
-              </a:spcAft>
-            </a:pPr>
-            <a:r>
-              <a:rPr sz="1200" b="0">
-                <a:solidFill>
-                  <a:srgbClr val="5F6368"/>
-                </a:solidFill>
-                <a:latin typeface="Calibri"/>
-              </a:rPr>
-              <a:t>Sessions indexed in docs/auction-app-build-design.md § “Build process — sessions”:</a:t>
-            </a:r>
-          </a:p>
-          <a:p>
-            <a:pPr>
-              <a:spcAft>
-                <a:spcPts val="900"/>
-              </a:spcAft>
-            </a:pPr>
-            <a:r>
-              <a:rPr sz="1500" b="0">
-                <a:solidFill>
-                  <a:srgbClr val="222222"/>
-                </a:solidFill>
-                <a:latin typeface="Calibri"/>
-              </a:rPr>
-              <a:t>•  Design</a:t>
-            </a:r>
-          </a:p>
-          <a:p>
-            <a:pPr>
-              <a:spcAft>
-                <a:spcPts val="900"/>
-              </a:spcAft>
-            </a:pPr>
-            <a:r>
-              <a:rPr sz="1500" b="0">
-                <a:solidFill>
-                  <a:srgbClr val="222222"/>
-                </a:solidFill>
-                <a:latin typeface="Calibri"/>
-              </a:rPr>
-              <a:t>•  Permissions &amp; access</a:t>
-            </a:r>
-          </a:p>
-          <a:p>
-            <a:pPr>
-              <a:spcAft>
-                <a:spcPts val="900"/>
-              </a:spcAft>
-            </a:pPr>
-            <a:r>
-              <a:rPr sz="1500" b="0">
-                <a:solidFill>
-                  <a:srgbClr val="222222"/>
-                </a:solidFill>
-                <a:latin typeface="Calibri"/>
-              </a:rPr>
-              <a:t>•  Backend database work</a:t>
-            </a:r>
-          </a:p>
-          <a:p>
-            <a:pPr>
-              <a:spcAft>
-                <a:spcPts val="900"/>
-              </a:spcAft>
-            </a:pPr>
-            <a:r>
-              <a:rPr sz="1500" b="0">
-                <a:solidFill>
-                  <a:srgbClr val="222222"/>
-                </a:solidFill>
-                <a:latin typeface="Calibri"/>
-              </a:rPr>
-              <a:t>•  Data Model</a:t>
-            </a:r>
-          </a:p>
-          <a:p>
-            <a:pPr>
-              <a:spcAft>
-                <a:spcPts val="900"/>
-              </a:spcAft>
-            </a:pPr>
-            <a:r>
-              <a:rPr sz="1500" b="0">
-                <a:solidFill>
-                  <a:srgbClr val="222222"/>
-                </a:solidFill>
-                <a:latin typeface="Calibri"/>
-              </a:rPr>
-              <a:t>•  RDT Synthetic Data</a:t>
-            </a:r>
-          </a:p>
-          <a:p>
-            <a:pPr>
-              <a:spcAft>
-                <a:spcPts val="900"/>
-              </a:spcAft>
-            </a:pPr>
-            <a:r>
-              <a:rPr sz="1500" b="0">
-                <a:solidFill>
-                  <a:srgbClr val="222222"/>
-                </a:solidFill>
-                <a:latin typeface="Calibri"/>
-              </a:rPr>
-              <a:t>•  RDT-Quality</a:t>
-            </a:r>
-          </a:p>
-          <a:p>
-            <a:pPr>
-              <a:spcAft>
-                <a:spcPts val="900"/>
-              </a:spcAft>
-            </a:pPr>
-            <a:r>
-              <a:rPr sz="1500" b="0">
-                <a:solidFill>
-                  <a:srgbClr val="222222"/>
-                </a:solidFill>
-                <a:latin typeface="Calibri"/>
-              </a:rPr>
-              <a:t>•  RDT-Security</a:t>
-            </a:r>
-          </a:p>
-          <a:p>
-            <a:pPr>
-              <a:spcAft>
-                <a:spcPts val="900"/>
-              </a:spcAft>
-            </a:pPr>
-            <a:r>
-              <a:rPr sz="1500" b="0">
-                <a:solidFill>
-                  <a:srgbClr val="222222"/>
-                </a:solidFill>
-                <a:latin typeface="Calibri"/>
-              </a:rPr>
-              <a:t>•  Links &amp; References index</a:t>
-            </a:r>
-          </a:p>
-        </p:txBody>
-      </p:sp>
-      <p:sp>
-        <p:nvSpPr>
-          <p:cNvPr id="6" name="TextBox 5"/>
+            <a:pPr algn="l">
+              <a:spcAft>
+                <a:spcPts val="400"/>
+              </a:spcAft>
+            </a:pPr>
+            <a:r>
+              <a:rPr sz="950" b="1" i="0">
+                <a:solidFill>
+                  <a:srgbClr val="111827"/>
+                </a:solidFill>
+                <a:latin typeface="Arial"/>
+              </a:rPr>
+              <a:t>Design</a:t>
+            </a:r>
+          </a:p>
+          <a:p>
+            <a:pPr algn="l">
+              <a:spcAft>
+                <a:spcPts val="400"/>
+              </a:spcAft>
+            </a:pPr>
+            <a:r>
+              <a:rPr sz="850" b="0" i="0">
+                <a:solidFill>
+                  <a:srgbClr val="111827"/>
+                </a:solidFill>
+                <a:latin typeface="Arial"/>
+              </a:rPr>
+              <a:t>v1 design, build design, mockups; decided the 8 demo beats and the stack.</a:t>
+            </a:r>
+          </a:p>
+        </p:txBody>
+      </p:sp>
+      <p:sp>
+        <p:nvSpPr>
+          <p:cNvPr id="6" name="Rounded Rectangle 5"/>
+          <p:cNvSpPr/>
+          <p:nvPr/>
+        </p:nvSpPr>
+        <p:spPr>
+          <a:xfrm>
+            <a:off x="566928" y="2020824"/>
+            <a:ext cx="246888" cy="201168"/>
+          </a:xfrm>
+          <a:prstGeom prst="roundRect">
+            <a:avLst>
+              <a:gd name="adj" fmla="val 50000"/>
+            </a:avLst>
+          </a:prstGeom>
+          <a:solidFill>
+            <a:srgbClr val="E8EEF8"/>
+          </a:solidFill>
+          <a:ln>
+            <a:noFill/>
+          </a:ln>
+          <a:effectLst/>
+        </p:spPr>
+        <p:txBody>
+          <a:bodyPr rtlCol="0" anchor="ctr" lIns="0" rIns="0" tIns="0" bIns="0"/>
+          <a:lstStyle/>
+          <a:p>
+            <a:pPr algn="ctr"/>
+            <a:r>
+              <a:rPr sz="800" b="1">
+                <a:solidFill>
+                  <a:srgbClr val="2F457A"/>
+                </a:solidFill>
+                <a:latin typeface="Arial"/>
+              </a:rPr>
+              <a:t>#3</a:t>
+            </a:r>
+          </a:p>
+        </p:txBody>
+      </p:sp>
+      <p:sp>
+        <p:nvSpPr>
+          <p:cNvPr id="7" name="Rounded Rectangle 6"/>
+          <p:cNvSpPr/>
+          <p:nvPr/>
+        </p:nvSpPr>
+        <p:spPr>
+          <a:xfrm>
+            <a:off x="886968" y="2020824"/>
+            <a:ext cx="315468" cy="201168"/>
+          </a:xfrm>
+          <a:prstGeom prst="roundRect">
+            <a:avLst>
+              <a:gd name="adj" fmla="val 50000"/>
+            </a:avLst>
+          </a:prstGeom>
+          <a:solidFill>
+            <a:srgbClr val="E8EEF8"/>
+          </a:solidFill>
+          <a:ln>
+            <a:noFill/>
+          </a:ln>
+          <a:effectLst/>
+        </p:spPr>
+        <p:txBody>
+          <a:bodyPr rtlCol="0" anchor="ctr" lIns="0" rIns="0" tIns="0" bIns="0"/>
+          <a:lstStyle/>
+          <a:p>
+            <a:pPr algn="ctr"/>
+            <a:r>
+              <a:rPr sz="800" b="1">
+                <a:solidFill>
+                  <a:srgbClr val="2F457A"/>
+                </a:solidFill>
+                <a:latin typeface="Arial"/>
+              </a:rPr>
+              <a:t>#17</a:t>
+            </a:r>
+          </a:p>
+        </p:txBody>
+      </p:sp>
+      <p:sp>
+        <p:nvSpPr>
+          <p:cNvPr id="8" name="Rounded Rectangle 7"/>
+          <p:cNvSpPr/>
+          <p:nvPr/>
+        </p:nvSpPr>
+        <p:spPr>
+          <a:xfrm>
+            <a:off x="1275588" y="2020824"/>
+            <a:ext cx="315468" cy="201168"/>
+          </a:xfrm>
+          <a:prstGeom prst="roundRect">
+            <a:avLst>
+              <a:gd name="adj" fmla="val 50000"/>
+            </a:avLst>
+          </a:prstGeom>
+          <a:solidFill>
+            <a:srgbClr val="E8EEF8"/>
+          </a:solidFill>
+          <a:ln>
+            <a:noFill/>
+          </a:ln>
+          <a:effectLst/>
+        </p:spPr>
+        <p:txBody>
+          <a:bodyPr rtlCol="0" anchor="ctr" lIns="0" rIns="0" tIns="0" bIns="0"/>
+          <a:lstStyle/>
+          <a:p>
+            <a:pPr algn="ctr"/>
+            <a:r>
+              <a:rPr sz="800" b="1">
+                <a:solidFill>
+                  <a:srgbClr val="2F457A"/>
+                </a:solidFill>
+                <a:latin typeface="Arial"/>
+              </a:rPr>
+              <a:t>#20</a:t>
+            </a:r>
+          </a:p>
+        </p:txBody>
+      </p:sp>
+      <p:sp>
+        <p:nvSpPr>
+          <p:cNvPr id="9" name="Rounded Rectangle 8"/>
+          <p:cNvSpPr/>
+          <p:nvPr/>
+        </p:nvSpPr>
+        <p:spPr>
+          <a:xfrm>
+            <a:off x="1664208" y="2020824"/>
+            <a:ext cx="315468" cy="201168"/>
+          </a:xfrm>
+          <a:prstGeom prst="roundRect">
+            <a:avLst>
+              <a:gd name="adj" fmla="val 50000"/>
+            </a:avLst>
+          </a:prstGeom>
+          <a:solidFill>
+            <a:srgbClr val="E8EEF8"/>
+          </a:solidFill>
+          <a:ln>
+            <a:noFill/>
+          </a:ln>
+          <a:effectLst/>
+        </p:spPr>
+        <p:txBody>
+          <a:bodyPr rtlCol="0" anchor="ctr" lIns="0" rIns="0" tIns="0" bIns="0"/>
+          <a:lstStyle/>
+          <a:p>
+            <a:pPr algn="ctr"/>
+            <a:r>
+              <a:rPr sz="800" b="1">
+                <a:solidFill>
+                  <a:srgbClr val="2F457A"/>
+                </a:solidFill>
+                <a:latin typeface="Arial"/>
+              </a:rPr>
+              <a:t>#36</a:t>
+            </a:r>
+          </a:p>
+        </p:txBody>
+      </p:sp>
+      <p:sp>
+        <p:nvSpPr>
+          <p:cNvPr id="10" name="Rounded Rectangle 9"/>
+          <p:cNvSpPr/>
+          <p:nvPr/>
+        </p:nvSpPr>
+        <p:spPr>
+          <a:xfrm>
+            <a:off x="2542032" y="1005840"/>
+            <a:ext cx="1975104" cy="1325880"/>
+          </a:xfrm>
+          <a:prstGeom prst="roundRect">
+            <a:avLst>
+              <a:gd name="adj" fmla="val 4000"/>
+            </a:avLst>
+          </a:prstGeom>
+          <a:solidFill>
+            <a:srgbClr val="FAFBFC"/>
+          </a:solidFill>
+          <a:ln w="9525">
+            <a:solidFill>
+              <a:srgbClr val="E3E7EE"/>
+            </a:solidFill>
+          </a:ln>
+          <a:effectLst/>
+        </p:spPr>
+        <p:txBody>
+          <a:bodyPr rtlCol="0" anchor="ctr"/>
+          <a:lstStyle/>
+          <a:p>
+            <a:pPr algn="ctr"/>
+          </a:p>
+        </p:txBody>
+      </p:sp>
+      <p:sp>
+        <p:nvSpPr>
+          <p:cNvPr id="11" name="TextBox 10"/>
           <p:cNvSpPr txBox="1"/>
           <p:nvPr/>
         </p:nvSpPr>
         <p:spPr>
           <a:xfrm>
-            <a:off x="6278727" y="1280160"/>
-            <a:ext cx="5455767" cy="4846320"/>
+            <a:off x="2651760" y="1115568"/>
+            <a:ext cx="1755648" cy="1106424"/>
           </a:xfrm>
           <a:prstGeom prst="rect">
             <a:avLst/>
@@ -4244,121 +5529,1931 @@
           <a:noFill/>
         </p:spPr>
         <p:txBody>
-          <a:bodyPr wrap="square" anchor="t" lIns="45720" rIns="45720" tIns="27432" bIns="27432">
+          <a:bodyPr wrap="square" anchor="t" lIns="0" rIns="0" tIns="0" bIns="0">
             <a:spAutoFit/>
           </a:bodyPr>
           <a:lstStyle/>
           <a:p>
-            <a:pPr>
-              <a:spcAft>
-                <a:spcPts val="800"/>
-              </a:spcAft>
-            </a:pPr>
-            <a:r>
-              <a:rPr sz="1500" b="1">
-                <a:solidFill>
-                  <a:srgbClr val="B45F06"/>
-                </a:solidFill>
-                <a:latin typeface="Calibri"/>
-              </a:rPr>
-              <a:t>GitHub workflow</a:t>
-            </a:r>
-          </a:p>
-          <a:p>
-            <a:pPr>
-              <a:spcAft>
-                <a:spcPts val="900"/>
-              </a:spcAft>
-            </a:pPr>
-            <a:r>
-              <a:rPr sz="1400" b="0">
-                <a:solidFill>
-                  <a:srgbClr val="222222"/>
-                </a:solidFill>
-                <a:latin typeface="Calibri"/>
-              </a:rPr>
-              <a:t>•  Each build step = one PR on a devin/* branch, with feature: / bug: commits and screenshots</a:t>
-            </a:r>
-          </a:p>
-          <a:p>
-            <a:pPr>
-              <a:spcAft>
-                <a:spcPts val="900"/>
-              </a:spcAft>
-            </a:pPr>
-            <a:r>
-              <a:rPr sz="1400" b="0">
-                <a:solidFill>
-                  <a:srgbClr val="222222"/>
-                </a:solidFill>
-                <a:latin typeface="Calibri"/>
-              </a:rPr>
-              <a:t>•  PRs opened by devin-ai-integration[bot]; reviewed and merged into main by CognitionMark</a:t>
-            </a:r>
-          </a:p>
-          <a:p>
-            <a:pPr>
-              <a:spcAft>
-                <a:spcPts val="900"/>
-              </a:spcAft>
-            </a:pPr>
-            <a:r>
-              <a:rPr sz="1400" b="0">
-                <a:solidFill>
-                  <a:srgbClr val="222222"/>
-                </a:solidFill>
-                <a:latin typeface="Calibri"/>
-              </a:rPr>
-              <a:t>•  Examples: #41 scaffold · #46 auctions &amp; bidding · #44 admin &amp; close · #47 seed data · #56 README &amp; architecture</a:t>
-            </a:r>
-          </a:p>
-          <a:p>
-            <a:pPr>
-              <a:spcAft>
-                <a:spcPts val="800"/>
-              </a:spcAft>
-            </a:pPr>
-            <a:r>
-              <a:rPr sz="1500" b="1">
-                <a:solidFill>
-                  <a:srgbClr val="B45F06"/>
-                </a:solidFill>
-                <a:latin typeface="Calibri"/>
-              </a:rPr>
-              <a:t>Secrets stay out of the public repo</a:t>
-            </a:r>
-          </a:p>
-          <a:p>
-            <a:pPr>
-              <a:spcAft>
-                <a:spcPts val="900"/>
-              </a:spcAft>
-            </a:pPr>
-            <a:r>
-              <a:rPr sz="1400" b="0">
-                <a:solidFill>
-                  <a:srgbClr val="222222"/>
-                </a:solidFill>
-                <a:latin typeface="Calibri"/>
-              </a:rPr>
-              <a:t>•  Hosts, IPs, users and ports live in the private Devin knowledge note “RDT infrastructure access”</a:t>
-            </a:r>
-          </a:p>
-          <a:p>
-            <a:pPr>
-              <a:spcAft>
-                <a:spcPts val="900"/>
-              </a:spcAft>
-            </a:pPr>
-            <a:r>
-              <a:rPr sz="1400" b="0">
-                <a:solidFill>
-                  <a:srgbClr val="222222"/>
-                </a:solidFill>
-                <a:latin typeface="Calibri"/>
-              </a:rPr>
-              <a:t>•  Credentials are Devin org secrets: AUCTION_DATABASE_URL, AUCTION_DATABASE_PASSWORD, RDT_EC2_SSH_KEY</a:t>
-            </a:r>
+            <a:pPr algn="l">
+              <a:spcAft>
+                <a:spcPts val="400"/>
+              </a:spcAft>
+            </a:pPr>
+            <a:r>
+              <a:rPr sz="950" b="1" i="0">
+                <a:solidFill>
+                  <a:srgbClr val="111827"/>
+                </a:solidFill>
+                <a:latin typeface="Arial"/>
+              </a:rPr>
+              <a:t>Data Model</a:t>
+            </a:r>
+          </a:p>
+          <a:p>
+            <a:pPr algn="l">
+              <a:spcAft>
+                <a:spcPts val="400"/>
+              </a:spcAft>
+            </a:pPr>
+            <a:r>
+              <a:rPr sz="850" b="0" i="0">
+                <a:solidFill>
+                  <a:srgbClr val="111827"/>
+                </a:solidFill>
+                <a:latin typeface="Arial"/>
+              </a:rPr>
+              <a:t>Frozen Postgres schema (9 tables), schema-review changes, auction-house survey.</a:t>
+            </a:r>
+          </a:p>
+        </p:txBody>
+      </p:sp>
+      <p:sp>
+        <p:nvSpPr>
+          <p:cNvPr id="12" name="Rounded Rectangle 11"/>
+          <p:cNvSpPr/>
+          <p:nvPr/>
+        </p:nvSpPr>
+        <p:spPr>
+          <a:xfrm>
+            <a:off x="2651760" y="2020824"/>
+            <a:ext cx="315468" cy="201168"/>
+          </a:xfrm>
+          <a:prstGeom prst="roundRect">
+            <a:avLst>
+              <a:gd name="adj" fmla="val 50000"/>
+            </a:avLst>
+          </a:prstGeom>
+          <a:solidFill>
+            <a:srgbClr val="E8EEF8"/>
+          </a:solidFill>
+          <a:ln>
+            <a:noFill/>
+          </a:ln>
+          <a:effectLst/>
+        </p:spPr>
+        <p:txBody>
+          <a:bodyPr rtlCol="0" anchor="ctr" lIns="0" rIns="0" tIns="0" bIns="0"/>
+          <a:lstStyle/>
+          <a:p>
+            <a:pPr algn="ctr"/>
+            <a:r>
+              <a:rPr sz="800" b="1">
+                <a:solidFill>
+                  <a:srgbClr val="2F457A"/>
+                </a:solidFill>
+                <a:latin typeface="Arial"/>
+              </a:rPr>
+              <a:t>#22</a:t>
+            </a:r>
+          </a:p>
+        </p:txBody>
+      </p:sp>
+      <p:sp>
+        <p:nvSpPr>
+          <p:cNvPr id="13" name="Rounded Rectangle 12"/>
+          <p:cNvSpPr/>
+          <p:nvPr/>
+        </p:nvSpPr>
+        <p:spPr>
+          <a:xfrm>
+            <a:off x="3040380" y="2020824"/>
+            <a:ext cx="315468" cy="201168"/>
+          </a:xfrm>
+          <a:prstGeom prst="roundRect">
+            <a:avLst>
+              <a:gd name="adj" fmla="val 50000"/>
+            </a:avLst>
+          </a:prstGeom>
+          <a:solidFill>
+            <a:srgbClr val="E8EEF8"/>
+          </a:solidFill>
+          <a:ln>
+            <a:noFill/>
+          </a:ln>
+          <a:effectLst/>
+        </p:spPr>
+        <p:txBody>
+          <a:bodyPr rtlCol="0" anchor="ctr" lIns="0" rIns="0" tIns="0" bIns="0"/>
+          <a:lstStyle/>
+          <a:p>
+            <a:pPr algn="ctr"/>
+            <a:r>
+              <a:rPr sz="800" b="1">
+                <a:solidFill>
+                  <a:srgbClr val="2F457A"/>
+                </a:solidFill>
+                <a:latin typeface="Arial"/>
+              </a:rPr>
+              <a:t>#34</a:t>
+            </a:r>
+          </a:p>
+        </p:txBody>
+      </p:sp>
+      <p:sp>
+        <p:nvSpPr>
+          <p:cNvPr id="14" name="Rounded Rectangle 13"/>
+          <p:cNvSpPr/>
+          <p:nvPr/>
+        </p:nvSpPr>
+        <p:spPr>
+          <a:xfrm>
+            <a:off x="3429000" y="2020824"/>
+            <a:ext cx="315468" cy="201168"/>
+          </a:xfrm>
+          <a:prstGeom prst="roundRect">
+            <a:avLst>
+              <a:gd name="adj" fmla="val 50000"/>
+            </a:avLst>
+          </a:prstGeom>
+          <a:solidFill>
+            <a:srgbClr val="E8EEF8"/>
+          </a:solidFill>
+          <a:ln>
+            <a:noFill/>
+          </a:ln>
+          <a:effectLst/>
+        </p:spPr>
+        <p:txBody>
+          <a:bodyPr rtlCol="0" anchor="ctr" lIns="0" rIns="0" tIns="0" bIns="0"/>
+          <a:lstStyle/>
+          <a:p>
+            <a:pPr algn="ctr"/>
+            <a:r>
+              <a:rPr sz="800" b="1">
+                <a:solidFill>
+                  <a:srgbClr val="2F457A"/>
+                </a:solidFill>
+                <a:latin typeface="Arial"/>
+              </a:rPr>
+              <a:t>#39</a:t>
+            </a:r>
+          </a:p>
+        </p:txBody>
+      </p:sp>
+      <p:sp>
+        <p:nvSpPr>
+          <p:cNvPr id="15" name="Rounded Rectangle 14"/>
+          <p:cNvSpPr/>
+          <p:nvPr/>
+        </p:nvSpPr>
+        <p:spPr>
+          <a:xfrm>
+            <a:off x="4626864" y="1005840"/>
+            <a:ext cx="1975104" cy="1325880"/>
+          </a:xfrm>
+          <a:prstGeom prst="roundRect">
+            <a:avLst>
+              <a:gd name="adj" fmla="val 4000"/>
+            </a:avLst>
+          </a:prstGeom>
+          <a:solidFill>
+            <a:srgbClr val="FAFBFC"/>
+          </a:solidFill>
+          <a:ln w="9525">
+            <a:solidFill>
+              <a:srgbClr val="E3E7EE"/>
+            </a:solidFill>
+          </a:ln>
+          <a:effectLst/>
+        </p:spPr>
+        <p:txBody>
+          <a:bodyPr rtlCol="0" anchor="ctr"/>
+          <a:lstStyle/>
+          <a:p>
+            <a:pPr algn="ctr"/>
+          </a:p>
+        </p:txBody>
+      </p:sp>
+      <p:sp>
+        <p:nvSpPr>
+          <p:cNvPr id="16" name="TextBox 15"/>
+          <p:cNvSpPr txBox="1"/>
+          <p:nvPr/>
+        </p:nvSpPr>
+        <p:spPr>
+          <a:xfrm>
+            <a:off x="4736592" y="1115568"/>
+            <a:ext cx="1755648" cy="1106424"/>
+          </a:xfrm>
+          <a:prstGeom prst="rect">
+            <a:avLst/>
+          </a:prstGeom>
+          <a:noFill/>
+        </p:spPr>
+        <p:txBody>
+          <a:bodyPr wrap="square" anchor="t" lIns="0" rIns="0" tIns="0" bIns="0">
+            <a:spAutoFit/>
+          </a:bodyPr>
+          <a:lstStyle/>
+          <a:p>
+            <a:pPr algn="l">
+              <a:spcAft>
+                <a:spcPts val="400"/>
+              </a:spcAft>
+            </a:pPr>
+            <a:r>
+              <a:rPr sz="950" b="1" i="0">
+                <a:solidFill>
+                  <a:srgbClr val="111827"/>
+                </a:solidFill>
+                <a:latin typeface="Arial"/>
+              </a:rPr>
+              <a:t>Backend database work · RDT Synthetic Data</a:t>
+            </a:r>
+          </a:p>
+          <a:p>
+            <a:pPr algn="l">
+              <a:spcAft>
+                <a:spcPts val="400"/>
+              </a:spcAft>
+            </a:pPr>
+            <a:r>
+              <a:rPr sz="850" b="0" i="0">
+                <a:solidFill>
+                  <a:srgbClr val="111827"/>
+                </a:solidFill>
+                <a:latin typeface="Arial"/>
+              </a:rPr>
+              <a:t>Supabase setup; 4 houses, 28 users, 8 auctions, 250 lots with images, bids, favorites.</a:t>
+            </a:r>
+          </a:p>
+        </p:txBody>
+      </p:sp>
+      <p:sp>
+        <p:nvSpPr>
+          <p:cNvPr id="17" name="Rounded Rectangle 16"/>
+          <p:cNvSpPr/>
+          <p:nvPr/>
+        </p:nvSpPr>
+        <p:spPr>
+          <a:xfrm>
+            <a:off x="4736592" y="2020824"/>
+            <a:ext cx="315468" cy="201168"/>
+          </a:xfrm>
+          <a:prstGeom prst="roundRect">
+            <a:avLst>
+              <a:gd name="adj" fmla="val 50000"/>
+            </a:avLst>
+          </a:prstGeom>
+          <a:solidFill>
+            <a:srgbClr val="E8EEF8"/>
+          </a:solidFill>
+          <a:ln>
+            <a:noFill/>
+          </a:ln>
+          <a:effectLst/>
+        </p:spPr>
+        <p:txBody>
+          <a:bodyPr rtlCol="0" anchor="ctr" lIns="0" rIns="0" tIns="0" bIns="0"/>
+          <a:lstStyle/>
+          <a:p>
+            <a:pPr algn="ctr"/>
+            <a:r>
+              <a:rPr sz="800" b="1">
+                <a:solidFill>
+                  <a:srgbClr val="2F457A"/>
+                </a:solidFill>
+                <a:latin typeface="Arial"/>
+              </a:rPr>
+              <a:t>#18</a:t>
+            </a:r>
+          </a:p>
+        </p:txBody>
+      </p:sp>
+      <p:sp>
+        <p:nvSpPr>
+          <p:cNvPr id="18" name="Rounded Rectangle 17"/>
+          <p:cNvSpPr/>
+          <p:nvPr/>
+        </p:nvSpPr>
+        <p:spPr>
+          <a:xfrm>
+            <a:off x="5125212" y="2020824"/>
+            <a:ext cx="315468" cy="201168"/>
+          </a:xfrm>
+          <a:prstGeom prst="roundRect">
+            <a:avLst>
+              <a:gd name="adj" fmla="val 50000"/>
+            </a:avLst>
+          </a:prstGeom>
+          <a:solidFill>
+            <a:srgbClr val="E8EEF8"/>
+          </a:solidFill>
+          <a:ln>
+            <a:noFill/>
+          </a:ln>
+          <a:effectLst/>
+        </p:spPr>
+        <p:txBody>
+          <a:bodyPr rtlCol="0" anchor="ctr" lIns="0" rIns="0" tIns="0" bIns="0"/>
+          <a:lstStyle/>
+          <a:p>
+            <a:pPr algn="ctr"/>
+            <a:r>
+              <a:rPr sz="800" b="1">
+                <a:solidFill>
+                  <a:srgbClr val="2F457A"/>
+                </a:solidFill>
+                <a:latin typeface="Arial"/>
+              </a:rPr>
+              <a:t>#47</a:t>
+            </a:r>
+          </a:p>
+        </p:txBody>
+      </p:sp>
+      <p:sp>
+        <p:nvSpPr>
+          <p:cNvPr id="19" name="Rounded Rectangle 18"/>
+          <p:cNvSpPr/>
+          <p:nvPr/>
+        </p:nvSpPr>
+        <p:spPr>
+          <a:xfrm>
+            <a:off x="5513832" y="2020824"/>
+            <a:ext cx="315468" cy="201168"/>
+          </a:xfrm>
+          <a:prstGeom prst="roundRect">
+            <a:avLst>
+              <a:gd name="adj" fmla="val 50000"/>
+            </a:avLst>
+          </a:prstGeom>
+          <a:solidFill>
+            <a:srgbClr val="E8EEF8"/>
+          </a:solidFill>
+          <a:ln>
+            <a:noFill/>
+          </a:ln>
+          <a:effectLst/>
+        </p:spPr>
+        <p:txBody>
+          <a:bodyPr rtlCol="0" anchor="ctr" lIns="0" rIns="0" tIns="0" bIns="0"/>
+          <a:lstStyle/>
+          <a:p>
+            <a:pPr algn="ctr"/>
+            <a:r>
+              <a:rPr sz="800" b="1">
+                <a:solidFill>
+                  <a:srgbClr val="2F457A"/>
+                </a:solidFill>
+                <a:latin typeface="Arial"/>
+              </a:rPr>
+              <a:t>#41</a:t>
+            </a:r>
+          </a:p>
+        </p:txBody>
+      </p:sp>
+      <p:sp>
+        <p:nvSpPr>
+          <p:cNvPr id="20" name="Rounded Rectangle 19"/>
+          <p:cNvSpPr/>
+          <p:nvPr/>
+        </p:nvSpPr>
+        <p:spPr>
+          <a:xfrm>
+            <a:off x="6711696" y="1005840"/>
+            <a:ext cx="1975104" cy="1325880"/>
+          </a:xfrm>
+          <a:prstGeom prst="roundRect">
+            <a:avLst>
+              <a:gd name="adj" fmla="val 4000"/>
+            </a:avLst>
+          </a:prstGeom>
+          <a:solidFill>
+            <a:srgbClr val="FAFBFC"/>
+          </a:solidFill>
+          <a:ln w="9525">
+            <a:solidFill>
+              <a:srgbClr val="E3E7EE"/>
+            </a:solidFill>
+          </a:ln>
+          <a:effectLst/>
+        </p:spPr>
+        <p:txBody>
+          <a:bodyPr rtlCol="0" anchor="ctr"/>
+          <a:lstStyle/>
+          <a:p>
+            <a:pPr algn="ctr"/>
+          </a:p>
+        </p:txBody>
+      </p:sp>
+      <p:sp>
+        <p:nvSpPr>
+          <p:cNvPr id="21" name="TextBox 20"/>
+          <p:cNvSpPr txBox="1"/>
+          <p:nvPr/>
+        </p:nvSpPr>
+        <p:spPr>
+          <a:xfrm>
+            <a:off x="6821424" y="1115568"/>
+            <a:ext cx="1755648" cy="1106424"/>
+          </a:xfrm>
+          <a:prstGeom prst="rect">
+            <a:avLst/>
+          </a:prstGeom>
+          <a:noFill/>
+        </p:spPr>
+        <p:txBody>
+          <a:bodyPr wrap="square" anchor="t" lIns="0" rIns="0" tIns="0" bIns="0">
+            <a:spAutoFit/>
+          </a:bodyPr>
+          <a:lstStyle/>
+          <a:p>
+            <a:pPr algn="l">
+              <a:spcAft>
+                <a:spcPts val="400"/>
+              </a:spcAft>
+            </a:pPr>
+            <a:r>
+              <a:rPr sz="950" b="1" i="0">
+                <a:solidFill>
+                  <a:srgbClr val="111827"/>
+                </a:solidFill>
+                <a:latin typeface="Arial"/>
+              </a:rPr>
+              <a:t>Permissions &amp; access · RDT-Quality · RDT-Security · Links &amp; References</a:t>
+            </a:r>
+          </a:p>
+          <a:p>
+            <a:pPr algn="l">
+              <a:spcAft>
+                <a:spcPts val="400"/>
+              </a:spcAft>
+            </a:pPr>
+            <a:r>
+              <a:rPr sz="850" b="0" i="0">
+                <a:solidFill>
+                  <a:srgbClr val="111827"/>
+                </a:solidFill>
+                <a:latin typeface="Arial"/>
+              </a:rPr>
+              <a:t>Access codes and session cookies, review passes, secrets moved to a private note, session index.</a:t>
+            </a:r>
+          </a:p>
+        </p:txBody>
+      </p:sp>
+      <p:sp>
+        <p:nvSpPr>
+          <p:cNvPr id="22" name="Rounded Rectangle 21"/>
+          <p:cNvSpPr/>
+          <p:nvPr/>
+        </p:nvSpPr>
+        <p:spPr>
+          <a:xfrm>
+            <a:off x="6821424" y="2020824"/>
+            <a:ext cx="315468" cy="201168"/>
+          </a:xfrm>
+          <a:prstGeom prst="roundRect">
+            <a:avLst>
+              <a:gd name="adj" fmla="val 50000"/>
+            </a:avLst>
+          </a:prstGeom>
+          <a:solidFill>
+            <a:srgbClr val="E8EEF8"/>
+          </a:solidFill>
+          <a:ln>
+            <a:noFill/>
+          </a:ln>
+          <a:effectLst/>
+        </p:spPr>
+        <p:txBody>
+          <a:bodyPr rtlCol="0" anchor="ctr" lIns="0" rIns="0" tIns="0" bIns="0"/>
+          <a:lstStyle/>
+          <a:p>
+            <a:pPr algn="ctr"/>
+            <a:r>
+              <a:rPr sz="800" b="1">
+                <a:solidFill>
+                  <a:srgbClr val="2F457A"/>
+                </a:solidFill>
+                <a:latin typeface="Arial"/>
+              </a:rPr>
+              <a:t>#51</a:t>
+            </a:r>
+          </a:p>
+        </p:txBody>
+      </p:sp>
+      <p:sp>
+        <p:nvSpPr>
+          <p:cNvPr id="23" name="Rounded Rectangle 22"/>
+          <p:cNvSpPr/>
+          <p:nvPr/>
+        </p:nvSpPr>
+        <p:spPr>
+          <a:xfrm>
+            <a:off x="7210044" y="2020824"/>
+            <a:ext cx="315468" cy="201168"/>
+          </a:xfrm>
+          <a:prstGeom prst="roundRect">
+            <a:avLst>
+              <a:gd name="adj" fmla="val 50000"/>
+            </a:avLst>
+          </a:prstGeom>
+          <a:solidFill>
+            <a:srgbClr val="E8EEF8"/>
+          </a:solidFill>
+          <a:ln>
+            <a:noFill/>
+          </a:ln>
+          <a:effectLst/>
+        </p:spPr>
+        <p:txBody>
+          <a:bodyPr rtlCol="0" anchor="ctr" lIns="0" rIns="0" tIns="0" bIns="0"/>
+          <a:lstStyle/>
+          <a:p>
+            <a:pPr algn="ctr"/>
+            <a:r>
+              <a:rPr sz="800" b="1">
+                <a:solidFill>
+                  <a:srgbClr val="2F457A"/>
+                </a:solidFill>
+                <a:latin typeface="Arial"/>
+              </a:rPr>
+              <a:t>#52</a:t>
+            </a:r>
+          </a:p>
+        </p:txBody>
+      </p:sp>
+      <p:sp>
+        <p:nvSpPr>
+          <p:cNvPr id="24" name="Rounded Rectangle 23"/>
+          <p:cNvSpPr/>
+          <p:nvPr/>
+        </p:nvSpPr>
+        <p:spPr>
+          <a:xfrm>
+            <a:off x="7598664" y="2020824"/>
+            <a:ext cx="315468" cy="201168"/>
+          </a:xfrm>
+          <a:prstGeom prst="roundRect">
+            <a:avLst>
+              <a:gd name="adj" fmla="val 50000"/>
+            </a:avLst>
+          </a:prstGeom>
+          <a:solidFill>
+            <a:srgbClr val="E8EEF8"/>
+          </a:solidFill>
+          <a:ln>
+            <a:noFill/>
+          </a:ln>
+          <a:effectLst/>
+        </p:spPr>
+        <p:txBody>
+          <a:bodyPr rtlCol="0" anchor="ctr" lIns="0" rIns="0" tIns="0" bIns="0"/>
+          <a:lstStyle/>
+          <a:p>
+            <a:pPr algn="ctr"/>
+            <a:r>
+              <a:rPr sz="800" b="1">
+                <a:solidFill>
+                  <a:srgbClr val="2F457A"/>
+                </a:solidFill>
+                <a:latin typeface="Arial"/>
+              </a:rPr>
+              <a:t>#53</a:t>
+            </a:r>
+          </a:p>
+        </p:txBody>
+      </p:sp>
+      <p:sp>
+        <p:nvSpPr>
+          <p:cNvPr id="25" name="Rounded Rectangle 24"/>
+          <p:cNvSpPr/>
+          <p:nvPr/>
+        </p:nvSpPr>
+        <p:spPr>
+          <a:xfrm>
+            <a:off x="7987284" y="2020824"/>
+            <a:ext cx="315468" cy="201168"/>
+          </a:xfrm>
+          <a:prstGeom prst="roundRect">
+            <a:avLst>
+              <a:gd name="adj" fmla="val 50000"/>
+            </a:avLst>
+          </a:prstGeom>
+          <a:solidFill>
+            <a:srgbClr val="E8EEF8"/>
+          </a:solidFill>
+          <a:ln>
+            <a:noFill/>
+          </a:ln>
+          <a:effectLst/>
+        </p:spPr>
+        <p:txBody>
+          <a:bodyPr rtlCol="0" anchor="ctr" lIns="0" rIns="0" tIns="0" bIns="0"/>
+          <a:lstStyle/>
+          <a:p>
+            <a:pPr algn="ctr"/>
+            <a:r>
+              <a:rPr sz="800" b="1">
+                <a:solidFill>
+                  <a:srgbClr val="2F457A"/>
+                </a:solidFill>
+                <a:latin typeface="Arial"/>
+              </a:rPr>
+              <a:t>#59</a:t>
+            </a:r>
+          </a:p>
+        </p:txBody>
+      </p:sp>
+      <p:sp>
+        <p:nvSpPr>
+          <p:cNvPr id="26" name="Rounded Rectangle 25"/>
+          <p:cNvSpPr/>
+          <p:nvPr/>
+        </p:nvSpPr>
+        <p:spPr>
+          <a:xfrm>
+            <a:off x="457200" y="2468880"/>
+            <a:ext cx="8229600" cy="2171700"/>
+          </a:xfrm>
+          <a:prstGeom prst="roundRect">
+            <a:avLst>
+              <a:gd name="adj" fmla="val 4000"/>
+            </a:avLst>
+          </a:prstGeom>
+          <a:solidFill>
+            <a:srgbClr val="FAFBFC"/>
+          </a:solidFill>
+          <a:ln w="9525">
+            <a:solidFill>
+              <a:srgbClr val="E3E7EE"/>
+            </a:solidFill>
+          </a:ln>
+          <a:effectLst/>
+        </p:spPr>
+        <p:txBody>
+          <a:bodyPr rtlCol="0" anchor="ctr"/>
+          <a:lstStyle/>
+          <a:p>
+            <a:pPr algn="ctr"/>
+          </a:p>
+        </p:txBody>
+      </p:sp>
+      <p:sp>
+        <p:nvSpPr>
+          <p:cNvPr id="27" name="TextBox 26"/>
+          <p:cNvSpPr txBox="1"/>
+          <p:nvPr/>
+        </p:nvSpPr>
+        <p:spPr>
+          <a:xfrm>
+            <a:off x="594360" y="2606040"/>
+            <a:ext cx="7955280" cy="228600"/>
+          </a:xfrm>
+          <a:prstGeom prst="rect">
+            <a:avLst/>
+          </a:prstGeom>
+          <a:noFill/>
+        </p:spPr>
+        <p:txBody>
+          <a:bodyPr wrap="square" anchor="t" lIns="0" rIns="0" tIns="0" bIns="0">
+            <a:spAutoFit/>
+          </a:bodyPr>
+          <a:lstStyle/>
+          <a:p>
+            <a:pPr algn="l">
+              <a:spcAft>
+                <a:spcPts val="400"/>
+              </a:spcAft>
+            </a:pPr>
+            <a:r>
+              <a:rPr sz="1050" b="1" i="0">
+                <a:solidFill>
+                  <a:srgbClr val="111827"/>
+                </a:solidFill>
+                <a:latin typeface="Arial"/>
+              </a:rPr>
+              <a:t>Execution — every change landed as a reviewed PR into </a:t>
+            </a:r>
+            <a:r>
+              <a:rPr sz="1000" b="1" i="0">
+                <a:solidFill>
+                  <a:srgbClr val="2F457A"/>
+                </a:solidFill>
+                <a:latin typeface="Courier New"/>
+              </a:rPr>
+              <a:t>main</a:t>
+            </a:r>
+          </a:p>
+        </p:txBody>
+      </p:sp>
+      <p:sp>
+        <p:nvSpPr>
+          <p:cNvPr id="28" name="TextBox 27"/>
+          <p:cNvSpPr txBox="1"/>
+          <p:nvPr/>
+        </p:nvSpPr>
+        <p:spPr>
+          <a:xfrm>
+            <a:off x="594360" y="2880360"/>
+            <a:ext cx="7955280" cy="228600"/>
+          </a:xfrm>
+          <a:prstGeom prst="rect">
+            <a:avLst/>
+          </a:prstGeom>
+          <a:noFill/>
+        </p:spPr>
+        <p:txBody>
+          <a:bodyPr wrap="square" anchor="t" lIns="0" rIns="0" tIns="0" bIns="0">
+            <a:spAutoFit/>
+          </a:bodyPr>
+          <a:lstStyle/>
+          <a:p>
+            <a:pPr algn="l">
+              <a:spcAft>
+                <a:spcPts val="400"/>
+              </a:spcAft>
+            </a:pPr>
+            <a:r>
+              <a:rPr sz="800" b="0" i="0">
+                <a:solidFill>
+                  <a:srgbClr val="5B677D"/>
+                </a:solidFill>
+                <a:latin typeface="Courier New"/>
+              </a:rPr>
+              <a:t>devin/* branches · feature:/bug: commits + screenshots · opened by devin-ai-integration[bot] · reviewed &amp; merged by CognitionMark</a:t>
+            </a:r>
+          </a:p>
+        </p:txBody>
+      </p:sp>
+      <p:sp>
+        <p:nvSpPr>
+          <p:cNvPr id="29" name="TextBox 28"/>
+          <p:cNvSpPr txBox="1"/>
+          <p:nvPr/>
+        </p:nvSpPr>
+        <p:spPr>
+          <a:xfrm>
+            <a:off x="594360" y="3127248"/>
+            <a:ext cx="1417320" cy="182880"/>
+          </a:xfrm>
+          <a:prstGeom prst="rect">
+            <a:avLst/>
+          </a:prstGeom>
+          <a:noFill/>
+        </p:spPr>
+        <p:txBody>
+          <a:bodyPr wrap="square" anchor="t" lIns="0" rIns="0" tIns="0" bIns="0">
+            <a:spAutoFit/>
+          </a:bodyPr>
+          <a:lstStyle/>
+          <a:p>
+            <a:pPr algn="l">
+              <a:spcAft>
+                <a:spcPts val="400"/>
+              </a:spcAft>
+            </a:pPr>
+            <a:r>
+              <a:rPr sz="700" b="0" i="0">
+                <a:solidFill>
+                  <a:srgbClr val="5B677D"/>
+                </a:solidFill>
+                <a:latin typeface="Courier New"/>
+              </a:rPr>
+              <a:t>WHEN</a:t>
+            </a:r>
+          </a:p>
+        </p:txBody>
+      </p:sp>
+      <p:sp>
+        <p:nvSpPr>
+          <p:cNvPr id="30" name="TextBox 29"/>
+          <p:cNvSpPr txBox="1"/>
+          <p:nvPr/>
+        </p:nvSpPr>
+        <p:spPr>
+          <a:xfrm>
+            <a:off x="2011680" y="3127248"/>
+            <a:ext cx="1600200" cy="182880"/>
+          </a:xfrm>
+          <a:prstGeom prst="rect">
+            <a:avLst/>
+          </a:prstGeom>
+          <a:noFill/>
+        </p:spPr>
+        <p:txBody>
+          <a:bodyPr wrap="square" anchor="t" lIns="0" rIns="0" tIns="0" bIns="0">
+            <a:spAutoFit/>
+          </a:bodyPr>
+          <a:lstStyle/>
+          <a:p>
+            <a:pPr algn="l">
+              <a:spcAft>
+                <a:spcPts val="400"/>
+              </a:spcAft>
+            </a:pPr>
+            <a:r>
+              <a:rPr sz="700" b="0" i="0">
+                <a:solidFill>
+                  <a:srgbClr val="5B677D"/>
+                </a:solidFill>
+                <a:latin typeface="Courier New"/>
+              </a:rPr>
+              <a:t>PRS</a:t>
+            </a:r>
+          </a:p>
+        </p:txBody>
+      </p:sp>
+      <p:sp>
+        <p:nvSpPr>
+          <p:cNvPr id="31" name="TextBox 30"/>
+          <p:cNvSpPr txBox="1"/>
+          <p:nvPr/>
+        </p:nvSpPr>
+        <p:spPr>
+          <a:xfrm>
+            <a:off x="3611880" y="3127248"/>
+            <a:ext cx="4937760" cy="182880"/>
+          </a:xfrm>
+          <a:prstGeom prst="rect">
+            <a:avLst/>
+          </a:prstGeom>
+          <a:noFill/>
+        </p:spPr>
+        <p:txBody>
+          <a:bodyPr wrap="square" anchor="t" lIns="0" rIns="0" tIns="0" bIns="0">
+            <a:spAutoFit/>
+          </a:bodyPr>
+          <a:lstStyle/>
+          <a:p>
+            <a:pPr algn="l">
+              <a:spcAft>
+                <a:spcPts val="400"/>
+              </a:spcAft>
+            </a:pPr>
+            <a:r>
+              <a:rPr sz="700" b="0" i="0">
+                <a:solidFill>
+                  <a:srgbClr val="5B677D"/>
+                </a:solidFill>
+                <a:latin typeface="Courier New"/>
+              </a:rPr>
+              <a:t>WHAT CHANGED</a:t>
+            </a:r>
+          </a:p>
+        </p:txBody>
+      </p:sp>
+      <p:sp>
+        <p:nvSpPr>
+          <p:cNvPr id="32" name="Rectangle 31"/>
+          <p:cNvSpPr/>
+          <p:nvPr/>
+        </p:nvSpPr>
+        <p:spPr>
+          <a:xfrm>
+            <a:off x="594360" y="3310128"/>
+            <a:ext cx="7955280" cy="9525"/>
+          </a:xfrm>
+          <a:prstGeom prst="rect">
+            <a:avLst/>
+          </a:prstGeom>
+          <a:solidFill>
+            <a:srgbClr val="EEF0F4"/>
+          </a:solidFill>
+          <a:ln>
+            <a:noFill/>
+          </a:ln>
+          <a:effectLst/>
+        </p:spPr>
+        <p:txBody>
+          <a:bodyPr rtlCol="0" anchor="ctr"/>
+          <a:lstStyle/>
+          <a:p>
+            <a:pPr algn="ctr"/>
+          </a:p>
+        </p:txBody>
+      </p:sp>
+      <p:sp>
+        <p:nvSpPr>
+          <p:cNvPr id="33" name="TextBox 32"/>
+          <p:cNvSpPr txBox="1"/>
+          <p:nvPr/>
+        </p:nvSpPr>
+        <p:spPr>
+          <a:xfrm>
+            <a:off x="594360" y="3346704"/>
+            <a:ext cx="1417320" cy="246888"/>
+          </a:xfrm>
+          <a:prstGeom prst="rect">
+            <a:avLst/>
+          </a:prstGeom>
+          <a:noFill/>
+        </p:spPr>
+        <p:txBody>
+          <a:bodyPr wrap="square" anchor="t" lIns="0" rIns="0" tIns="0" bIns="0">
+            <a:spAutoFit/>
+          </a:bodyPr>
+          <a:lstStyle/>
+          <a:p>
+            <a:pPr algn="l">
+              <a:spcAft>
+                <a:spcPts val="400"/>
+              </a:spcAft>
+            </a:pPr>
+            <a:r>
+              <a:rPr sz="850" b="0" i="0">
+                <a:solidFill>
+                  <a:srgbClr val="5B677D"/>
+                </a:solidFill>
+                <a:latin typeface="Arial"/>
+              </a:rPr>
+              <a:t>Sep 14, 15:59–18:43</a:t>
+            </a:r>
+          </a:p>
+        </p:txBody>
+      </p:sp>
+      <p:sp>
+        <p:nvSpPr>
+          <p:cNvPr id="34" name="TextBox 33"/>
+          <p:cNvSpPr txBox="1"/>
+          <p:nvPr/>
+        </p:nvSpPr>
+        <p:spPr>
+          <a:xfrm>
+            <a:off x="2011680" y="3346704"/>
+            <a:ext cx="1600200" cy="246888"/>
+          </a:xfrm>
+          <a:prstGeom prst="rect">
+            <a:avLst/>
+          </a:prstGeom>
+          <a:noFill/>
+        </p:spPr>
+        <p:txBody>
+          <a:bodyPr wrap="square" anchor="t" lIns="0" rIns="0" tIns="0" bIns="0">
+            <a:spAutoFit/>
+          </a:bodyPr>
+          <a:lstStyle/>
+          <a:p>
+            <a:pPr algn="l">
+              <a:spcAft>
+                <a:spcPts val="400"/>
+              </a:spcAft>
+            </a:pPr>
+            <a:r>
+              <a:rPr sz="850" b="0" i="0">
+                <a:solidFill>
+                  <a:srgbClr val="5B677D"/>
+                </a:solidFill>
+                <a:latin typeface="Arial"/>
+              </a:rPr>
+              <a:t>#1–#3, #17, #18</a:t>
+            </a:r>
+          </a:p>
+        </p:txBody>
+      </p:sp>
+      <p:sp>
+        <p:nvSpPr>
+          <p:cNvPr id="35" name="TextBox 34"/>
+          <p:cNvSpPr txBox="1"/>
+          <p:nvPr/>
+        </p:nvSpPr>
+        <p:spPr>
+          <a:xfrm>
+            <a:off x="3611880" y="3346704"/>
+            <a:ext cx="4937760" cy="246888"/>
+          </a:xfrm>
+          <a:prstGeom prst="rect">
+            <a:avLst/>
+          </a:prstGeom>
+          <a:noFill/>
+        </p:spPr>
+        <p:txBody>
+          <a:bodyPr wrap="square" anchor="t" lIns="0" rIns="0" tIns="0" bIns="0">
+            <a:spAutoFit/>
+          </a:bodyPr>
+          <a:lstStyle/>
+          <a:p>
+            <a:pPr algn="l">
+              <a:spcAft>
+                <a:spcPts val="400"/>
+              </a:spcAft>
+            </a:pPr>
+            <a:r>
+              <a:rPr sz="850" b="0" i="0">
+                <a:solidFill>
+                  <a:srgbClr val="111827"/>
+                </a:solidFill>
+                <a:latin typeface="Arial"/>
+              </a:rPr>
+              <a:t>Static site, v1 design proposal, review fixes, mock seed data</a:t>
+            </a:r>
+          </a:p>
+        </p:txBody>
+      </p:sp>
+      <p:sp>
+        <p:nvSpPr>
+          <p:cNvPr id="36" name="Rectangle 35"/>
+          <p:cNvSpPr/>
+          <p:nvPr/>
+        </p:nvSpPr>
+        <p:spPr>
+          <a:xfrm>
+            <a:off x="594360" y="3557016"/>
+            <a:ext cx="7955280" cy="9525"/>
+          </a:xfrm>
+          <a:prstGeom prst="rect">
+            <a:avLst/>
+          </a:prstGeom>
+          <a:solidFill>
+            <a:srgbClr val="EEF0F4"/>
+          </a:solidFill>
+          <a:ln>
+            <a:noFill/>
+          </a:ln>
+          <a:effectLst/>
+        </p:spPr>
+        <p:txBody>
+          <a:bodyPr rtlCol="0" anchor="ctr"/>
+          <a:lstStyle/>
+          <a:p>
+            <a:pPr algn="ctr"/>
+          </a:p>
+        </p:txBody>
+      </p:sp>
+      <p:sp>
+        <p:nvSpPr>
+          <p:cNvPr id="37" name="TextBox 36"/>
+          <p:cNvSpPr txBox="1"/>
+          <p:nvPr/>
+        </p:nvSpPr>
+        <p:spPr>
+          <a:xfrm>
+            <a:off x="594360" y="3593592"/>
+            <a:ext cx="1417320" cy="246888"/>
+          </a:xfrm>
+          <a:prstGeom prst="rect">
+            <a:avLst/>
+          </a:prstGeom>
+          <a:noFill/>
+        </p:spPr>
+        <p:txBody>
+          <a:bodyPr wrap="square" anchor="t" lIns="0" rIns="0" tIns="0" bIns="0">
+            <a:spAutoFit/>
+          </a:bodyPr>
+          <a:lstStyle/>
+          <a:p>
+            <a:pPr algn="l">
+              <a:spcAft>
+                <a:spcPts val="400"/>
+              </a:spcAft>
+            </a:pPr>
+            <a:r>
+              <a:rPr sz="850" b="0" i="0">
+                <a:solidFill>
+                  <a:srgbClr val="5B677D"/>
+                </a:solidFill>
+                <a:latin typeface="Arial"/>
+              </a:rPr>
+              <a:t>Sep 14, 21:18–23:25</a:t>
+            </a:r>
+          </a:p>
+        </p:txBody>
+      </p:sp>
+      <p:sp>
+        <p:nvSpPr>
+          <p:cNvPr id="38" name="TextBox 37"/>
+          <p:cNvSpPr txBox="1"/>
+          <p:nvPr/>
+        </p:nvSpPr>
+        <p:spPr>
+          <a:xfrm>
+            <a:off x="2011680" y="3593592"/>
+            <a:ext cx="1600200" cy="246888"/>
+          </a:xfrm>
+          <a:prstGeom prst="rect">
+            <a:avLst/>
+          </a:prstGeom>
+          <a:noFill/>
+        </p:spPr>
+        <p:txBody>
+          <a:bodyPr wrap="square" anchor="t" lIns="0" rIns="0" tIns="0" bIns="0">
+            <a:spAutoFit/>
+          </a:bodyPr>
+          <a:lstStyle/>
+          <a:p>
+            <a:pPr algn="l">
+              <a:spcAft>
+                <a:spcPts val="400"/>
+              </a:spcAft>
+            </a:pPr>
+            <a:r>
+              <a:rPr sz="850" b="0" i="0">
+                <a:solidFill>
+                  <a:srgbClr val="5B677D"/>
+                </a:solidFill>
+                <a:latin typeface="Arial"/>
+              </a:rPr>
+              <a:t>#22, #20, #34, #39, #36</a:t>
+            </a:r>
+          </a:p>
+        </p:txBody>
+      </p:sp>
+      <p:sp>
+        <p:nvSpPr>
+          <p:cNvPr id="39" name="TextBox 38"/>
+          <p:cNvSpPr txBox="1"/>
+          <p:nvPr/>
+        </p:nvSpPr>
+        <p:spPr>
+          <a:xfrm>
+            <a:off x="3611880" y="3593592"/>
+            <a:ext cx="4937760" cy="246888"/>
+          </a:xfrm>
+          <a:prstGeom prst="rect">
+            <a:avLst/>
+          </a:prstGeom>
+          <a:noFill/>
+        </p:spPr>
+        <p:txBody>
+          <a:bodyPr wrap="square" anchor="t" lIns="0" rIns="0" tIns="0" bIns="0">
+            <a:spAutoFit/>
+          </a:bodyPr>
+          <a:lstStyle/>
+          <a:p>
+            <a:pPr algn="l">
+              <a:spcAft>
+                <a:spcPts val="400"/>
+              </a:spcAft>
+            </a:pPr>
+            <a:r>
+              <a:rPr sz="850" b="0" i="0">
+                <a:solidFill>
+                  <a:srgbClr val="111827"/>
+                </a:solidFill>
+                <a:latin typeface="Arial"/>
+              </a:rPr>
+              <a:t>v2 schema, summary mockup, Postgres data model, build design</a:t>
+            </a:r>
+          </a:p>
+        </p:txBody>
+      </p:sp>
+      <p:sp>
+        <p:nvSpPr>
+          <p:cNvPr id="40" name="Rectangle 39"/>
+          <p:cNvSpPr/>
+          <p:nvPr/>
+        </p:nvSpPr>
+        <p:spPr>
+          <a:xfrm>
+            <a:off x="594360" y="3803904"/>
+            <a:ext cx="7955280" cy="9525"/>
+          </a:xfrm>
+          <a:prstGeom prst="rect">
+            <a:avLst/>
+          </a:prstGeom>
+          <a:solidFill>
+            <a:srgbClr val="EEF0F4"/>
+          </a:solidFill>
+          <a:ln>
+            <a:noFill/>
+          </a:ln>
+          <a:effectLst/>
+        </p:spPr>
+        <p:txBody>
+          <a:bodyPr rtlCol="0" anchor="ctr"/>
+          <a:lstStyle/>
+          <a:p>
+            <a:pPr algn="ctr"/>
+          </a:p>
+        </p:txBody>
+      </p:sp>
+      <p:sp>
+        <p:nvSpPr>
+          <p:cNvPr id="41" name="TextBox 40"/>
+          <p:cNvSpPr txBox="1"/>
+          <p:nvPr/>
+        </p:nvSpPr>
+        <p:spPr>
+          <a:xfrm>
+            <a:off x="594360" y="3840480"/>
+            <a:ext cx="1417320" cy="246888"/>
+          </a:xfrm>
+          <a:prstGeom prst="rect">
+            <a:avLst/>
+          </a:prstGeom>
+          <a:noFill/>
+        </p:spPr>
+        <p:txBody>
+          <a:bodyPr wrap="square" anchor="t" lIns="0" rIns="0" tIns="0" bIns="0">
+            <a:spAutoFit/>
+          </a:bodyPr>
+          <a:lstStyle/>
+          <a:p>
+            <a:pPr algn="l">
+              <a:spcAft>
+                <a:spcPts val="400"/>
+              </a:spcAft>
+            </a:pPr>
+            <a:r>
+              <a:rPr sz="850" b="0" i="0">
+                <a:solidFill>
+                  <a:srgbClr val="5B677D"/>
+                </a:solidFill>
+                <a:latin typeface="Arial"/>
+              </a:rPr>
+              <a:t>Sep 15, 00:20–00:33</a:t>
+            </a:r>
+          </a:p>
+        </p:txBody>
+      </p:sp>
+      <p:sp>
+        <p:nvSpPr>
+          <p:cNvPr id="42" name="TextBox 41"/>
+          <p:cNvSpPr txBox="1"/>
+          <p:nvPr/>
+        </p:nvSpPr>
+        <p:spPr>
+          <a:xfrm>
+            <a:off x="2011680" y="3840480"/>
+            <a:ext cx="1600200" cy="246888"/>
+          </a:xfrm>
+          <a:prstGeom prst="rect">
+            <a:avLst/>
+          </a:prstGeom>
+          <a:noFill/>
+        </p:spPr>
+        <p:txBody>
+          <a:bodyPr wrap="square" anchor="t" lIns="0" rIns="0" tIns="0" bIns="0">
+            <a:spAutoFit/>
+          </a:bodyPr>
+          <a:lstStyle/>
+          <a:p>
+            <a:pPr algn="l">
+              <a:spcAft>
+                <a:spcPts val="400"/>
+              </a:spcAft>
+            </a:pPr>
+            <a:r>
+              <a:rPr sz="850" b="0" i="0">
+                <a:solidFill>
+                  <a:srgbClr val="5B677D"/>
+                </a:solidFill>
+                <a:latin typeface="Arial"/>
+              </a:rPr>
+              <a:t>#47, #51, #41</a:t>
+            </a:r>
+          </a:p>
+        </p:txBody>
+      </p:sp>
+      <p:sp>
+        <p:nvSpPr>
+          <p:cNvPr id="43" name="TextBox 42"/>
+          <p:cNvSpPr txBox="1"/>
+          <p:nvPr/>
+        </p:nvSpPr>
+        <p:spPr>
+          <a:xfrm>
+            <a:off x="3611880" y="3840480"/>
+            <a:ext cx="4937760" cy="246888"/>
+          </a:xfrm>
+          <a:prstGeom prst="rect">
+            <a:avLst/>
+          </a:prstGeom>
+          <a:noFill/>
+        </p:spPr>
+        <p:txBody>
+          <a:bodyPr wrap="square" anchor="t" lIns="0" rIns="0" tIns="0" bIns="0">
+            <a:spAutoFit/>
+          </a:bodyPr>
+          <a:lstStyle/>
+          <a:p>
+            <a:pPr algn="l">
+              <a:spcAft>
+                <a:spcPts val="400"/>
+              </a:spcAft>
+            </a:pPr>
+            <a:r>
+              <a:rPr sz="850" b="0" i="0">
+                <a:solidFill>
+                  <a:srgbClr val="111827"/>
+                </a:solidFill>
+                <a:latin typeface="Arial"/>
+              </a:rPr>
+              <a:t>Full seed data, session index, the app itself (scaffold, summary, bidding, admin, poller)</a:t>
+            </a:r>
+          </a:p>
+        </p:txBody>
+      </p:sp>
+      <p:sp>
+        <p:nvSpPr>
+          <p:cNvPr id="44" name="Rectangle 43"/>
+          <p:cNvSpPr/>
+          <p:nvPr/>
+        </p:nvSpPr>
+        <p:spPr>
+          <a:xfrm>
+            <a:off x="594360" y="4050792"/>
+            <a:ext cx="7955280" cy="9525"/>
+          </a:xfrm>
+          <a:prstGeom prst="rect">
+            <a:avLst/>
+          </a:prstGeom>
+          <a:solidFill>
+            <a:srgbClr val="EEF0F4"/>
+          </a:solidFill>
+          <a:ln>
+            <a:noFill/>
+          </a:ln>
+          <a:effectLst/>
+        </p:spPr>
+        <p:txBody>
+          <a:bodyPr rtlCol="0" anchor="ctr"/>
+          <a:lstStyle/>
+          <a:p>
+            <a:pPr algn="ctr"/>
+          </a:p>
+        </p:txBody>
+      </p:sp>
+      <p:sp>
+        <p:nvSpPr>
+          <p:cNvPr id="45" name="TextBox 44"/>
+          <p:cNvSpPr txBox="1"/>
+          <p:nvPr/>
+        </p:nvSpPr>
+        <p:spPr>
+          <a:xfrm>
+            <a:off x="594360" y="4087368"/>
+            <a:ext cx="1417320" cy="246888"/>
+          </a:xfrm>
+          <a:prstGeom prst="rect">
+            <a:avLst/>
+          </a:prstGeom>
+          <a:noFill/>
+        </p:spPr>
+        <p:txBody>
+          <a:bodyPr wrap="square" anchor="t" lIns="0" rIns="0" tIns="0" bIns="0">
+            <a:spAutoFit/>
+          </a:bodyPr>
+          <a:lstStyle/>
+          <a:p>
+            <a:pPr algn="l">
+              <a:spcAft>
+                <a:spcPts val="400"/>
+              </a:spcAft>
+            </a:pPr>
+            <a:r>
+              <a:rPr sz="850" b="0" i="0">
+                <a:solidFill>
+                  <a:srgbClr val="5B677D"/>
+                </a:solidFill>
+                <a:latin typeface="Arial"/>
+              </a:rPr>
+              <a:t>Sep 15, 00:37–01:00</a:t>
+            </a:r>
+          </a:p>
+        </p:txBody>
+      </p:sp>
+      <p:sp>
+        <p:nvSpPr>
+          <p:cNvPr id="46" name="TextBox 45"/>
+          <p:cNvSpPr txBox="1"/>
+          <p:nvPr/>
+        </p:nvSpPr>
+        <p:spPr>
+          <a:xfrm>
+            <a:off x="2011680" y="4087368"/>
+            <a:ext cx="1600200" cy="246888"/>
+          </a:xfrm>
+          <a:prstGeom prst="rect">
+            <a:avLst/>
+          </a:prstGeom>
+          <a:noFill/>
+        </p:spPr>
+        <p:txBody>
+          <a:bodyPr wrap="square" anchor="t" lIns="0" rIns="0" tIns="0" bIns="0">
+            <a:spAutoFit/>
+          </a:bodyPr>
+          <a:lstStyle/>
+          <a:p>
+            <a:pPr algn="l">
+              <a:spcAft>
+                <a:spcPts val="400"/>
+              </a:spcAft>
+            </a:pPr>
+            <a:r>
+              <a:rPr sz="850" b="0" i="0">
+                <a:solidFill>
+                  <a:srgbClr val="5B677D"/>
+                </a:solidFill>
+                <a:latin typeface="Arial"/>
+              </a:rPr>
+              <a:t>#52, #53, #55, #56, #57</a:t>
+            </a:r>
+          </a:p>
+        </p:txBody>
+      </p:sp>
+      <p:sp>
+        <p:nvSpPr>
+          <p:cNvPr id="47" name="TextBox 46"/>
+          <p:cNvSpPr txBox="1"/>
+          <p:nvPr/>
+        </p:nvSpPr>
+        <p:spPr>
+          <a:xfrm>
+            <a:off x="3611880" y="4087368"/>
+            <a:ext cx="4937760" cy="246888"/>
+          </a:xfrm>
+          <a:prstGeom prst="rect">
+            <a:avLst/>
+          </a:prstGeom>
+          <a:noFill/>
+        </p:spPr>
+        <p:txBody>
+          <a:bodyPr wrap="square" anchor="t" lIns="0" rIns="0" tIns="0" bIns="0">
+            <a:spAutoFit/>
+          </a:bodyPr>
+          <a:lstStyle/>
+          <a:p>
+            <a:pPr algn="l">
+              <a:spcAft>
+                <a:spcPts val="400"/>
+              </a:spcAft>
+            </a:pPr>
+            <a:r>
+              <a:rPr sz="850" b="0" i="0">
+                <a:solidFill>
+                  <a:srgbClr val="111827"/>
+                </a:solidFill>
+                <a:latin typeface="Arial"/>
+              </a:rPr>
+              <a:t>Secrets out of the repo, Caddy TLS, README + architecture, static site removed</a:t>
+            </a:r>
+          </a:p>
+        </p:txBody>
+      </p:sp>
+      <p:sp>
+        <p:nvSpPr>
+          <p:cNvPr id="48" name="Rectangle 47"/>
+          <p:cNvSpPr/>
+          <p:nvPr/>
+        </p:nvSpPr>
+        <p:spPr>
+          <a:xfrm>
+            <a:off x="594360" y="4297680"/>
+            <a:ext cx="7955280" cy="9525"/>
+          </a:xfrm>
+          <a:prstGeom prst="rect">
+            <a:avLst/>
+          </a:prstGeom>
+          <a:solidFill>
+            <a:srgbClr val="EEF0F4"/>
+          </a:solidFill>
+          <a:ln>
+            <a:noFill/>
+          </a:ln>
+          <a:effectLst/>
+        </p:spPr>
+        <p:txBody>
+          <a:bodyPr rtlCol="0" anchor="ctr"/>
+          <a:lstStyle/>
+          <a:p>
+            <a:pPr algn="ctr"/>
+          </a:p>
+        </p:txBody>
+      </p:sp>
+      <p:sp>
+        <p:nvSpPr>
+          <p:cNvPr id="49" name="TextBox 48"/>
+          <p:cNvSpPr txBox="1"/>
+          <p:nvPr/>
+        </p:nvSpPr>
+        <p:spPr>
+          <a:xfrm>
+            <a:off x="594360" y="4334256"/>
+            <a:ext cx="1417320" cy="246888"/>
+          </a:xfrm>
+          <a:prstGeom prst="rect">
+            <a:avLst/>
+          </a:prstGeom>
+          <a:noFill/>
+        </p:spPr>
+        <p:txBody>
+          <a:bodyPr wrap="square" anchor="t" lIns="0" rIns="0" tIns="0" bIns="0">
+            <a:spAutoFit/>
+          </a:bodyPr>
+          <a:lstStyle/>
+          <a:p>
+            <a:pPr algn="l">
+              <a:spcAft>
+                <a:spcPts val="400"/>
+              </a:spcAft>
+            </a:pPr>
+            <a:r>
+              <a:rPr sz="850" b="0" i="0">
+                <a:solidFill>
+                  <a:srgbClr val="5B677D"/>
+                </a:solidFill>
+                <a:latin typeface="Arial"/>
+              </a:rPr>
+              <a:t>Sep 15, 01:19–08:57</a:t>
+            </a:r>
+          </a:p>
+        </p:txBody>
+      </p:sp>
+      <p:sp>
+        <p:nvSpPr>
+          <p:cNvPr id="50" name="TextBox 49"/>
+          <p:cNvSpPr txBox="1"/>
+          <p:nvPr/>
+        </p:nvSpPr>
+        <p:spPr>
+          <a:xfrm>
+            <a:off x="2011680" y="4334256"/>
+            <a:ext cx="1600200" cy="246888"/>
+          </a:xfrm>
+          <a:prstGeom prst="rect">
+            <a:avLst/>
+          </a:prstGeom>
+          <a:noFill/>
+        </p:spPr>
+        <p:txBody>
+          <a:bodyPr wrap="square" anchor="t" lIns="0" rIns="0" tIns="0" bIns="0">
+            <a:spAutoFit/>
+          </a:bodyPr>
+          <a:lstStyle/>
+          <a:p>
+            <a:pPr algn="l">
+              <a:spcAft>
+                <a:spcPts val="400"/>
+              </a:spcAft>
+            </a:pPr>
+            <a:r>
+              <a:rPr sz="850" b="0" i="0">
+                <a:solidFill>
+                  <a:srgbClr val="5B677D"/>
+                </a:solidFill>
+                <a:latin typeface="Arial"/>
+              </a:rPr>
+              <a:t>#59, #63</a:t>
+            </a:r>
+          </a:p>
+        </p:txBody>
+      </p:sp>
+      <p:sp>
+        <p:nvSpPr>
+          <p:cNvPr id="51" name="TextBox 50"/>
+          <p:cNvSpPr txBox="1"/>
+          <p:nvPr/>
+        </p:nvSpPr>
+        <p:spPr>
+          <a:xfrm>
+            <a:off x="3611880" y="4334256"/>
+            <a:ext cx="4937760" cy="246888"/>
+          </a:xfrm>
+          <a:prstGeom prst="rect">
+            <a:avLst/>
+          </a:prstGeom>
+          <a:noFill/>
+        </p:spPr>
+        <p:txBody>
+          <a:bodyPr wrap="square" anchor="t" lIns="0" rIns="0" tIns="0" bIns="0">
+            <a:spAutoFit/>
+          </a:bodyPr>
+          <a:lstStyle/>
+          <a:p>
+            <a:pPr algn="l">
+              <a:spcAft>
+                <a:spcPts val="400"/>
+              </a:spcAft>
+            </a:pPr>
+            <a:r>
+              <a:rPr sz="850" b="0" i="0">
+                <a:solidFill>
+                  <a:srgbClr val="111827"/>
+                </a:solidFill>
+                <a:latin typeface="Arial"/>
+              </a:rPr>
+              <a:t>Session cookies + Sign out; “Portrait of Devin” lot</a:t>
+            </a:r>
+          </a:p>
+        </p:txBody>
+      </p:sp>
+      <p:sp>
+        <p:nvSpPr>
+          <p:cNvPr id="52" name="TextBox 51"/>
+          <p:cNvSpPr txBox="1"/>
+          <p:nvPr/>
+        </p:nvSpPr>
+        <p:spPr>
+          <a:xfrm>
+            <a:off x="457200" y="4759452"/>
+            <a:ext cx="5486400" cy="182880"/>
+          </a:xfrm>
+          <a:prstGeom prst="rect">
+            <a:avLst/>
+          </a:prstGeom>
+          <a:noFill/>
+        </p:spPr>
+        <p:txBody>
+          <a:bodyPr wrap="square" anchor="t" lIns="0" rIns="0" tIns="0" bIns="0">
+            <a:spAutoFit/>
+          </a:bodyPr>
+          <a:lstStyle/>
+          <a:p>
+            <a:pPr algn="l">
+              <a:spcAft>
+                <a:spcPts val="400"/>
+              </a:spcAft>
+            </a:pPr>
+            <a:r>
+              <a:rPr sz="750" b="0" i="0">
+                <a:solidFill>
+                  <a:srgbClr val="5B677D"/>
+                </a:solidFill>
+                <a:latin typeface="Courier New"/>
+              </a:rPr>
+              <a:t>Delegation &amp; execution · 20 of 20 PRs merged</a:t>
+            </a:r>
+          </a:p>
+        </p:txBody>
+      </p:sp>
+      <p:sp>
+        <p:nvSpPr>
+          <p:cNvPr id="53" name="TextBox 52"/>
+          <p:cNvSpPr txBox="1"/>
+          <p:nvPr/>
+        </p:nvSpPr>
+        <p:spPr>
+          <a:xfrm>
+            <a:off x="7315200" y="4759452"/>
+            <a:ext cx="1371600" cy="182880"/>
+          </a:xfrm>
+          <a:prstGeom prst="rect">
+            <a:avLst/>
+          </a:prstGeom>
+          <a:noFill/>
+        </p:spPr>
+        <p:txBody>
+          <a:bodyPr wrap="square" anchor="t" lIns="0" rIns="0" tIns="0" bIns="0">
+            <a:spAutoFit/>
+          </a:bodyPr>
+          <a:lstStyle/>
+          <a:p>
+            <a:pPr algn="r">
+              <a:spcAft>
+                <a:spcPts val="400"/>
+              </a:spcAft>
+            </a:pPr>
+            <a:r>
+              <a:rPr sz="750" b="0" i="0">
+                <a:solidFill>
+                  <a:srgbClr val="5B677D"/>
+                </a:solidFill>
+                <a:latin typeface="Courier New"/>
+              </a:rPr>
+              <a:t>5 / 6</a:t>
+            </a:r>
+          </a:p>
+        </p:txBody>
+      </p:sp>
+    </p:spTree>
+  </p:cSld>
+  <p:clrMapOvr>
+    <a:masterClrMapping/>
+  </p:clrMapOvr>
+</p:sld>
+</file>
+
+<file path=ppt/slides/slide6.xml><?xml version="1.0" encoding="utf-8"?>
+<p:sld xmlns:a="http://schemas.openxmlformats.org/drawingml/2006/main" xmlns:p="http://schemas.openxmlformats.org/presentationml/2006/main" xmlns:r="http://schemas.openxmlformats.org/officeDocument/2006/relationships">
+  <p:cSld>
+    <p:spTree>
+      <p:nvGrpSpPr>
+        <p:cNvPr id="1" name=""/>
+        <p:cNvGrpSpPr/>
+        <p:nvPr/>
+      </p:nvGrpSpPr>
+      <p:grpSpPr/>
+      <p:sp>
+        <p:nvSpPr>
+          <p:cNvPr id="2" name="TextBox 1"/>
+          <p:cNvSpPr txBox="1"/>
+          <p:nvPr/>
+        </p:nvSpPr>
+        <p:spPr>
+          <a:xfrm>
+            <a:off x="457200" y="292608"/>
+            <a:ext cx="8229600" cy="228600"/>
+          </a:xfrm>
+          <a:prstGeom prst="rect">
+            <a:avLst/>
+          </a:prstGeom>
+          <a:noFill/>
+        </p:spPr>
+        <p:txBody>
+          <a:bodyPr wrap="square" anchor="t" lIns="0" rIns="0" tIns="0" bIns="0">
+            <a:spAutoFit/>
+          </a:bodyPr>
+          <a:lstStyle/>
+          <a:p>
+            <a:pPr algn="l">
+              <a:spcAft>
+                <a:spcPts val="400"/>
+              </a:spcAft>
+            </a:pPr>
+            <a:r>
+              <a:rPr sz="800" b="0" i="0">
+                <a:solidFill>
+                  <a:srgbClr val="4F5F8F"/>
+                </a:solidFill>
+                <a:latin typeface="Courier New"/>
+              </a:rPr>
+              <a:t>NEXT STEPS · PATH FORWARD</a:t>
+            </a:r>
+          </a:p>
+        </p:txBody>
+      </p:sp>
+      <p:sp>
+        <p:nvSpPr>
+          <p:cNvPr id="3" name="TextBox 2"/>
+          <p:cNvSpPr txBox="1"/>
+          <p:nvPr/>
+        </p:nvSpPr>
+        <p:spPr>
+          <a:xfrm>
+            <a:off x="457200" y="502920"/>
+            <a:ext cx="8229600" cy="411480"/>
+          </a:xfrm>
+          <a:prstGeom prst="rect">
+            <a:avLst/>
+          </a:prstGeom>
+          <a:noFill/>
+        </p:spPr>
+        <p:txBody>
+          <a:bodyPr wrap="square" anchor="t" lIns="0" rIns="0" tIns="0" bIns="0">
+            <a:spAutoFit/>
+          </a:bodyPr>
+          <a:lstStyle/>
+          <a:p>
+            <a:pPr algn="l">
+              <a:spcAft>
+                <a:spcPts val="400"/>
+              </a:spcAft>
+            </a:pPr>
+            <a:r>
+              <a:rPr sz="2200" b="1" i="0">
+                <a:solidFill>
+                  <a:srgbClr val="111827"/>
+                </a:solidFill>
+                <a:latin typeface="Arial"/>
+              </a:rPr>
+              <a:t>From a demo-night build to something the team keeps</a:t>
+            </a:r>
+          </a:p>
+        </p:txBody>
+      </p:sp>
+      <p:sp>
+        <p:nvSpPr>
+          <p:cNvPr id="4" name="Rounded Rectangle 3"/>
+          <p:cNvSpPr/>
+          <p:nvPr/>
+        </p:nvSpPr>
+        <p:spPr>
+          <a:xfrm>
+            <a:off x="457200" y="1005840"/>
+            <a:ext cx="4046220" cy="2103120"/>
+          </a:xfrm>
+          <a:prstGeom prst="roundRect">
+            <a:avLst>
+              <a:gd name="adj" fmla="val 4000"/>
+            </a:avLst>
+          </a:prstGeom>
+          <a:solidFill>
+            <a:srgbClr val="FAFBFC"/>
+          </a:solidFill>
+          <a:ln w="9525">
+            <a:solidFill>
+              <a:srgbClr val="E3E7EE"/>
+            </a:solidFill>
+          </a:ln>
+          <a:effectLst/>
+        </p:spPr>
+        <p:txBody>
+          <a:bodyPr rtlCol="0" anchor="ctr"/>
+          <a:lstStyle/>
+          <a:p>
+            <a:pPr algn="ctr"/>
+          </a:p>
+        </p:txBody>
+      </p:sp>
+      <p:sp>
+        <p:nvSpPr>
+          <p:cNvPr id="5" name="TextBox 4"/>
+          <p:cNvSpPr txBox="1"/>
+          <p:nvPr/>
+        </p:nvSpPr>
+        <p:spPr>
+          <a:xfrm>
+            <a:off x="594360" y="1143000"/>
+            <a:ext cx="3771900" cy="1828800"/>
+          </a:xfrm>
+          <a:prstGeom prst="rect">
+            <a:avLst/>
+          </a:prstGeom>
+          <a:noFill/>
+        </p:spPr>
+        <p:txBody>
+          <a:bodyPr wrap="square" anchor="t" lIns="0" rIns="0" tIns="0" bIns="0">
+            <a:spAutoFit/>
+          </a:bodyPr>
+          <a:lstStyle/>
+          <a:p>
+            <a:pPr algn="l">
+              <a:spcAft>
+                <a:spcPts val="500"/>
+              </a:spcAft>
+            </a:pPr>
+            <a:r>
+              <a:rPr sz="1100" b="1" i="0">
+                <a:solidFill>
+                  <a:srgbClr val="111827"/>
+                </a:solidFill>
+                <a:latin typeface="Arial"/>
+              </a:rPr>
+              <a:t>1 · Own the images</a:t>
+            </a:r>
+          </a:p>
+          <a:p>
+            <a:pPr algn="l">
+              <a:spcAft>
+                <a:spcPts val="1000"/>
+              </a:spcAft>
+            </a:pPr>
+            <a:r>
+              <a:rPr sz="950" b="0" i="0">
+                <a:solidFill>
+                  <a:srgbClr val="111827"/>
+                </a:solidFill>
+                <a:latin typeface="Arial"/>
+              </a:rPr>
+              <a:t>Lot images are hotlinked from Wikimedia/Wikipedia today. Upload them to the Supabase lots bucket (needs a service-role key) before treating the deployment as public.</a:t>
+            </a:r>
+          </a:p>
+          <a:p>
+            <a:pPr algn="l">
+              <a:spcAft>
+                <a:spcPts val="500"/>
+              </a:spcAft>
+            </a:pPr>
+            <a:r>
+              <a:rPr sz="1100" b="1" i="0">
+                <a:solidFill>
+                  <a:srgbClr val="111827"/>
+                </a:solidFill>
+                <a:latin typeface="Arial"/>
+              </a:rPr>
+              <a:t>2 · Real avatars and local time</a:t>
+            </a:r>
+          </a:p>
+          <a:p>
+            <a:pPr algn="l">
+              <a:spcAft>
+                <a:spcPts val="400"/>
+              </a:spcAft>
+            </a:pPr>
+            <a:r>
+              <a:rPr sz="950" b="0" i="0">
+                <a:solidFill>
+                  <a:srgbClr val="111827"/>
+                </a:solidFill>
+                <a:latin typeface="Arial"/>
+              </a:rPr>
+              <a:t>Seed users still use gravatar fallbacks (#42) and times render in UTC rather than US Central (#45).</a:t>
+            </a:r>
+          </a:p>
+        </p:txBody>
+      </p:sp>
+      <p:sp>
+        <p:nvSpPr>
+          <p:cNvPr id="6" name="Rounded Rectangle 5"/>
+          <p:cNvSpPr/>
+          <p:nvPr/>
+        </p:nvSpPr>
+        <p:spPr>
+          <a:xfrm>
+            <a:off x="4640580" y="1005840"/>
+            <a:ext cx="4046220" cy="2103120"/>
+          </a:xfrm>
+          <a:prstGeom prst="roundRect">
+            <a:avLst>
+              <a:gd name="adj" fmla="val 4000"/>
+            </a:avLst>
+          </a:prstGeom>
+          <a:solidFill>
+            <a:srgbClr val="FAFBFC"/>
+          </a:solidFill>
+          <a:ln w="9525">
+            <a:solidFill>
+              <a:srgbClr val="E3E7EE"/>
+            </a:solidFill>
+          </a:ln>
+          <a:effectLst/>
+        </p:spPr>
+        <p:txBody>
+          <a:bodyPr rtlCol="0" anchor="ctr"/>
+          <a:lstStyle/>
+          <a:p>
+            <a:pPr algn="ctr"/>
           </a:p>
         </p:txBody>
       </p:sp>
@@ -4370,8 +7465,8 @@
         </p:nvSpPr>
         <p:spPr>
           <a:xfrm>
-            <a:off x="457200" y="6446520"/>
-            <a:ext cx="11277295" cy="274320"/>
+            <a:off x="4777740" y="1143000"/>
+            <a:ext cx="3771900" cy="1828800"/>
           </a:xfrm>
           <a:prstGeom prst="rect">
             <a:avLst/>
@@ -4379,24 +7474,239 @@
           <a:noFill/>
         </p:spPr>
         <p:txBody>
-          <a:bodyPr wrap="square" anchor="t" lIns="45720" rIns="45720" tIns="27432" bIns="27432">
+          <a:bodyPr wrap="square" anchor="t" lIns="0" rIns="0" tIns="0" bIns="0">
             <a:spAutoFit/>
           </a:bodyPr>
           <a:lstStyle/>
           <a:p>
-            <a:pPr>
-              <a:spcAft>
-                <a:spcPts val="600"/>
-              </a:spcAft>
-            </a:pPr>
-            <a:r>
-              <a:rPr sz="900" b="0">
-                <a:solidFill>
-                  <a:srgbClr val="5F6368"/>
-                </a:solidFill>
-                <a:latin typeface="Calibri"/>
-              </a:rPr>
-              <a:t>COG-GTM/realdreamteam  ·  docs/generate_overview_deck.py  ·  3/3</a:t>
+            <a:pPr algn="l">
+              <a:spcAft>
+                <a:spcPts val="500"/>
+              </a:spcAft>
+            </a:pPr>
+            <a:r>
+              <a:rPr sz="1100" b="1" i="0">
+                <a:solidFill>
+                  <a:srgbClr val="111827"/>
+                </a:solidFill>
+                <a:latin typeface="Arial"/>
+              </a:rPr>
+              <a:t>3 · Bring back the deferred v1 features</a:t>
+            </a:r>
+          </a:p>
+          <a:p>
+            <a:pPr algn="l">
+              <a:spcAft>
+                <a:spcPts val="1000"/>
+              </a:spcAft>
+            </a:pPr>
+            <a:r>
+              <a:rPr sz="950" b="0" i="0">
+                <a:solidFill>
+                  <a:srgbClr val="111827"/>
+                </a:solidFill>
+                <a:latin typeface="Arial"/>
+              </a:rPr>
+              <a:t>Search and filters, pagination, lot edit/delete, and realtime updates instead of refresh were all cut on purpose for the demo window.</a:t>
+            </a:r>
+          </a:p>
+          <a:p>
+            <a:pPr algn="l">
+              <a:spcAft>
+                <a:spcPts val="500"/>
+              </a:spcAft>
+            </a:pPr>
+            <a:r>
+              <a:rPr sz="1100" b="1" i="0">
+                <a:solidFill>
+                  <a:srgbClr val="111827"/>
+                </a:solidFill>
+                <a:latin typeface="Arial"/>
+              </a:rPr>
+              <a:t>4 · Slack notifications</a:t>
+            </a:r>
+          </a:p>
+          <a:p>
+            <a:pPr algn="l">
+              <a:spcAft>
+                <a:spcPts val="400"/>
+              </a:spcAft>
+            </a:pPr>
+            <a:r>
+              <a:rPr sz="950" b="0" i="0">
+                <a:solidFill>
+                  <a:srgbClr val="111827"/>
+                </a:solidFill>
+                <a:latin typeface="Arial"/>
+              </a:rPr>
+              <a:t>The in-app feed is the source of truth; the Slack webhook is wired but optional. Turn it on for new-lot and outbid events once the channel is agreed.</a:t>
+            </a:r>
+          </a:p>
+        </p:txBody>
+      </p:sp>
+      <p:sp>
+        <p:nvSpPr>
+          <p:cNvPr id="8" name="Rounded Rectangle 7"/>
+          <p:cNvSpPr/>
+          <p:nvPr/>
+        </p:nvSpPr>
+        <p:spPr>
+          <a:xfrm>
+            <a:off x="457200" y="3246120"/>
+            <a:ext cx="8229600" cy="868680"/>
+          </a:xfrm>
+          <a:prstGeom prst="roundRect">
+            <a:avLst>
+              <a:gd name="adj" fmla="val 4000"/>
+            </a:avLst>
+          </a:prstGeom>
+          <a:solidFill>
+            <a:srgbClr val="FAFBFC"/>
+          </a:solidFill>
+          <a:ln w="9525">
+            <a:solidFill>
+              <a:srgbClr val="E3E7EE"/>
+            </a:solidFill>
+          </a:ln>
+          <a:effectLst/>
+        </p:spPr>
+        <p:txBody>
+          <a:bodyPr rtlCol="0" anchor="ctr"/>
+          <a:lstStyle/>
+          <a:p>
+            <a:pPr algn="ctr"/>
+          </a:p>
+        </p:txBody>
+      </p:sp>
+      <p:sp>
+        <p:nvSpPr>
+          <p:cNvPr id="9" name="TextBox 8"/>
+          <p:cNvSpPr txBox="1"/>
+          <p:nvPr/>
+        </p:nvSpPr>
+        <p:spPr>
+          <a:xfrm>
+            <a:off x="594360" y="3383280"/>
+            <a:ext cx="7955280" cy="594360"/>
+          </a:xfrm>
+          <a:prstGeom prst="rect">
+            <a:avLst/>
+          </a:prstGeom>
+          <a:noFill/>
+        </p:spPr>
+        <p:txBody>
+          <a:bodyPr wrap="square" anchor="t" lIns="0" rIns="0" tIns="0" bIns="0">
+            <a:spAutoFit/>
+          </a:bodyPr>
+          <a:lstStyle/>
+          <a:p>
+            <a:pPr algn="l">
+              <a:spcAft>
+                <a:spcPts val="500"/>
+              </a:spcAft>
+            </a:pPr>
+            <a:r>
+              <a:rPr sz="1100" b="1" i="0">
+                <a:solidFill>
+                  <a:srgbClr val="111827"/>
+                </a:solidFill>
+                <a:latin typeface="Arial"/>
+              </a:rPr>
+              <a:t>What has to come with it</a:t>
+            </a:r>
+          </a:p>
+          <a:p>
+            <a:pPr algn="l">
+              <a:spcAft>
+                <a:spcPts val="400"/>
+              </a:spcAft>
+            </a:pPr>
+            <a:r>
+              <a:rPr sz="950" b="0" i="0">
+                <a:solidFill>
+                  <a:srgbClr val="111827"/>
+                </a:solidFill>
+                <a:latin typeface="Arial"/>
+              </a:rPr>
+              <a:t>Infrastructure details stay in the private “RDT infrastructure access” knowledge note and the org secrets (AUCTION_DATABASE_URL, AUCTION_DATABASE_PASSWORD, RDT_EC2_SSH_KEY); the repo has node --test unit tests but no CI yet — the gap today is a PR check that runs them.</a:t>
+            </a:r>
+          </a:p>
+        </p:txBody>
+      </p:sp>
+      <p:sp>
+        <p:nvSpPr>
+          <p:cNvPr id="10" name="TextBox 9"/>
+          <p:cNvSpPr txBox="1"/>
+          <p:nvPr/>
+        </p:nvSpPr>
+        <p:spPr>
+          <a:xfrm>
+            <a:off x="457200" y="4759452"/>
+            <a:ext cx="5486400" cy="182880"/>
+          </a:xfrm>
+          <a:prstGeom prst="rect">
+            <a:avLst/>
+          </a:prstGeom>
+          <a:noFill/>
+        </p:spPr>
+        <p:txBody>
+          <a:bodyPr wrap="square" anchor="t" lIns="0" rIns="0" tIns="0" bIns="0">
+            <a:spAutoFit/>
+          </a:bodyPr>
+          <a:lstStyle/>
+          <a:p>
+            <a:pPr algn="l">
+              <a:spcAft>
+                <a:spcPts val="400"/>
+              </a:spcAft>
+            </a:pPr>
+            <a:r>
+              <a:rPr sz="750" b="0" i="0">
+                <a:solidFill>
+                  <a:srgbClr val="5B677D"/>
+                </a:solidFill>
+                <a:latin typeface="Courier New"/>
+              </a:rPr>
+              <a:t>Path forward</a:t>
+            </a:r>
+          </a:p>
+        </p:txBody>
+      </p:sp>
+      <p:sp>
+        <p:nvSpPr>
+          <p:cNvPr id="11" name="TextBox 10"/>
+          <p:cNvSpPr txBox="1"/>
+          <p:nvPr/>
+        </p:nvSpPr>
+        <p:spPr>
+          <a:xfrm>
+            <a:off x="7315200" y="4759452"/>
+            <a:ext cx="1371600" cy="182880"/>
+          </a:xfrm>
+          <a:prstGeom prst="rect">
+            <a:avLst/>
+          </a:prstGeom>
+          <a:noFill/>
+        </p:spPr>
+        <p:txBody>
+          <a:bodyPr wrap="square" anchor="t" lIns="0" rIns="0" tIns="0" bIns="0">
+            <a:spAutoFit/>
+          </a:bodyPr>
+          <a:lstStyle/>
+          <a:p>
+            <a:pPr algn="r">
+              <a:spcAft>
+                <a:spcPts val="400"/>
+              </a:spcAft>
+            </a:pPr>
+            <a:r>
+              <a:rPr sz="750" b="0" i="0">
+                <a:solidFill>
+                  <a:srgbClr val="5B677D"/>
+                </a:solidFill>
+                <a:latin typeface="Courier New"/>
+              </a:rPr>
+              <a:t>6 / 6</a:t>
             </a:r>
           </a:p>
         </p:txBody>
